--- a/FastAPI/Introduction to FastAPI.pptx
+++ b/FastAPI/Introduction to FastAPI.pptx
@@ -5,7 +5,7 @@
     <p:sldMasterId id="2147483710" r:id="rId1"/>
   </p:sldMasterIdLst>
   <p:notesMasterIdLst>
-    <p:notesMasterId r:id="rId63"/>
+    <p:notesMasterId r:id="rId47"/>
   </p:notesMasterIdLst>
   <p:sldIdLst>
     <p:sldId id="526" r:id="rId2"/>
@@ -52,23 +52,7 @@
     <p:sldId id="573" r:id="rId43"/>
     <p:sldId id="574" r:id="rId44"/>
     <p:sldId id="578" r:id="rId45"/>
-    <p:sldId id="575" r:id="rId46"/>
-    <p:sldId id="576" r:id="rId47"/>
-    <p:sldId id="577" r:id="rId48"/>
-    <p:sldId id="306" r:id="rId49"/>
-    <p:sldId id="309" r:id="rId50"/>
-    <p:sldId id="310" r:id="rId51"/>
-    <p:sldId id="312" r:id="rId52"/>
-    <p:sldId id="313" r:id="rId53"/>
-    <p:sldId id="314" r:id="rId54"/>
-    <p:sldId id="315" r:id="rId55"/>
-    <p:sldId id="320" r:id="rId56"/>
-    <p:sldId id="530" r:id="rId57"/>
-    <p:sldId id="531" r:id="rId58"/>
-    <p:sldId id="532" r:id="rId59"/>
-    <p:sldId id="533" r:id="rId60"/>
-    <p:sldId id="534" r:id="rId61"/>
-    <p:sldId id="535" r:id="rId62"/>
+    <p:sldId id="531" r:id="rId46"/>
   </p:sldIdLst>
   <p:sldSz cx="12192000" cy="6858000"/>
   <p:notesSz cx="6858000" cy="9144000"/>
@@ -188,7 +172,7 @@
   <pc:docChgLst>
     <pc:chgData name="Pramod Naik" userId="ceb6df04-ef15-4d9b-a141-998a03559d75" providerId="ADAL" clId="{62E9B5AE-779D-4001-92D3-8FF830A8A9C1}"/>
     <pc:docChg chg="undo custSel addSld delSld modSld">
-      <pc:chgData name="Pramod Naik" userId="ceb6df04-ef15-4d9b-a141-998a03559d75" providerId="ADAL" clId="{62E9B5AE-779D-4001-92D3-8FF830A8A9C1}" dt="2025-10-20T07:03:01.242" v="2373" actId="20577"/>
+      <pc:chgData name="Pramod Naik" userId="ceb6df04-ef15-4d9b-a141-998a03559d75" providerId="ADAL" clId="{62E9B5AE-779D-4001-92D3-8FF830A8A9C1}" dt="2025-10-26T05:53:41.772" v="2460" actId="2696"/>
       <pc:docMkLst>
         <pc:docMk/>
       </pc:docMkLst>
@@ -242,19 +226,11 @@
         </pc:sldMkLst>
       </pc:sldChg>
       <pc:sldChg chg="modSp add del mod">
-        <pc:chgData name="Pramod Naik" userId="ceb6df04-ef15-4d9b-a141-998a03559d75" providerId="ADAL" clId="{62E9B5AE-779D-4001-92D3-8FF830A8A9C1}" dt="2025-10-11T09:18:32.989" v="557" actId="20577"/>
+        <pc:chgData name="Pramod Naik" userId="ceb6df04-ef15-4d9b-a141-998a03559d75" providerId="ADAL" clId="{62E9B5AE-779D-4001-92D3-8FF830A8A9C1}" dt="2025-10-26T05:53:41.772" v="2460" actId="2696"/>
         <pc:sldMkLst>
           <pc:docMk/>
           <pc:sldMk cId="3332929625" sldId="306"/>
         </pc:sldMkLst>
-        <pc:spChg chg="mod">
-          <ac:chgData name="Pramod Naik" userId="ceb6df04-ef15-4d9b-a141-998a03559d75" providerId="ADAL" clId="{62E9B5AE-779D-4001-92D3-8FF830A8A9C1}" dt="2025-10-11T09:18:32.989" v="557" actId="20577"/>
-          <ac:spMkLst>
-            <pc:docMk/>
-            <pc:sldMk cId="3332929625" sldId="306"/>
-            <ac:spMk id="3" creationId="{6A33E1D5-CA5D-7393-4CE8-623A831841B0}"/>
-          </ac:spMkLst>
-        </pc:spChg>
       </pc:sldChg>
       <pc:sldChg chg="del">
         <pc:chgData name="Pramod Naik" userId="ceb6df04-ef15-4d9b-a141-998a03559d75" providerId="ADAL" clId="{62E9B5AE-779D-4001-92D3-8FF830A8A9C1}" dt="2025-09-20T10:41:56.127" v="217" actId="47"/>
@@ -271,42 +247,18 @@
         </pc:sldMkLst>
       </pc:sldChg>
       <pc:sldChg chg="modSp add del mod">
-        <pc:chgData name="Pramod Naik" userId="ceb6df04-ef15-4d9b-a141-998a03559d75" providerId="ADAL" clId="{62E9B5AE-779D-4001-92D3-8FF830A8A9C1}" dt="2025-10-11T09:18:13.097" v="546" actId="20577"/>
+        <pc:chgData name="Pramod Naik" userId="ceb6df04-ef15-4d9b-a141-998a03559d75" providerId="ADAL" clId="{62E9B5AE-779D-4001-92D3-8FF830A8A9C1}" dt="2025-10-26T05:53:41.772" v="2460" actId="2696"/>
         <pc:sldMkLst>
           <pc:docMk/>
           <pc:sldMk cId="2300769400" sldId="309"/>
         </pc:sldMkLst>
-        <pc:spChg chg="mod">
-          <ac:chgData name="Pramod Naik" userId="ceb6df04-ef15-4d9b-a141-998a03559d75" providerId="ADAL" clId="{62E9B5AE-779D-4001-92D3-8FF830A8A9C1}" dt="2025-10-11T09:18:13.097" v="546" actId="20577"/>
-          <ac:spMkLst>
-            <pc:docMk/>
-            <pc:sldMk cId="2300769400" sldId="309"/>
-            <ac:spMk id="3" creationId="{B3E740B7-3016-3ABF-8912-284FC640E81B}"/>
-          </ac:spMkLst>
-        </pc:spChg>
       </pc:sldChg>
       <pc:sldChg chg="addSp delSp modSp add del mod">
-        <pc:chgData name="Pramod Naik" userId="ceb6df04-ef15-4d9b-a141-998a03559d75" providerId="ADAL" clId="{62E9B5AE-779D-4001-92D3-8FF830A8A9C1}" dt="2025-10-11T09:19:37.707" v="581" actId="1076"/>
+        <pc:chgData name="Pramod Naik" userId="ceb6df04-ef15-4d9b-a141-998a03559d75" providerId="ADAL" clId="{62E9B5AE-779D-4001-92D3-8FF830A8A9C1}" dt="2025-10-26T05:53:41.772" v="2460" actId="2696"/>
         <pc:sldMkLst>
           <pc:docMk/>
           <pc:sldMk cId="1739931258" sldId="310"/>
         </pc:sldMkLst>
-        <pc:spChg chg="mod">
-          <ac:chgData name="Pramod Naik" userId="ceb6df04-ef15-4d9b-a141-998a03559d75" providerId="ADAL" clId="{62E9B5AE-779D-4001-92D3-8FF830A8A9C1}" dt="2025-10-11T09:19:31.065" v="577" actId="20577"/>
-          <ac:spMkLst>
-            <pc:docMk/>
-            <pc:sldMk cId="1739931258" sldId="310"/>
-            <ac:spMk id="3" creationId="{0A2E6B69-87AA-BAD3-6374-33CF86703D7D}"/>
-          </ac:spMkLst>
-        </pc:spChg>
-        <pc:picChg chg="add mod">
-          <ac:chgData name="Pramod Naik" userId="ceb6df04-ef15-4d9b-a141-998a03559d75" providerId="ADAL" clId="{62E9B5AE-779D-4001-92D3-8FF830A8A9C1}" dt="2025-10-11T09:19:37.707" v="581" actId="1076"/>
-          <ac:picMkLst>
-            <pc:docMk/>
-            <pc:sldMk cId="1739931258" sldId="310"/>
-            <ac:picMk id="6" creationId="{E167A523-6135-BAA6-3635-3A881B9CED8E}"/>
-          </ac:picMkLst>
-        </pc:picChg>
       </pc:sldChg>
       <pc:sldChg chg="add del">
         <pc:chgData name="Pramod Naik" userId="ceb6df04-ef15-4d9b-a141-998a03559d75" providerId="ADAL" clId="{62E9B5AE-779D-4001-92D3-8FF830A8A9C1}" dt="2025-10-11T09:19:43.258" v="582" actId="47"/>
@@ -316,88 +268,32 @@
         </pc:sldMkLst>
       </pc:sldChg>
       <pc:sldChg chg="modSp add del mod">
-        <pc:chgData name="Pramod Naik" userId="ceb6df04-ef15-4d9b-a141-998a03559d75" providerId="ADAL" clId="{62E9B5AE-779D-4001-92D3-8FF830A8A9C1}" dt="2025-10-11T09:20:21.949" v="608" actId="20577"/>
+        <pc:chgData name="Pramod Naik" userId="ceb6df04-ef15-4d9b-a141-998a03559d75" providerId="ADAL" clId="{62E9B5AE-779D-4001-92D3-8FF830A8A9C1}" dt="2025-10-26T05:53:41.772" v="2460" actId="2696"/>
         <pc:sldMkLst>
           <pc:docMk/>
           <pc:sldMk cId="3279370306" sldId="312"/>
         </pc:sldMkLst>
-        <pc:spChg chg="mod">
-          <ac:chgData name="Pramod Naik" userId="ceb6df04-ef15-4d9b-a141-998a03559d75" providerId="ADAL" clId="{62E9B5AE-779D-4001-92D3-8FF830A8A9C1}" dt="2025-10-11T09:20:21.949" v="608" actId="20577"/>
-          <ac:spMkLst>
-            <pc:docMk/>
-            <pc:sldMk cId="3279370306" sldId="312"/>
-            <ac:spMk id="3" creationId="{411785FC-CF7A-2BDA-F499-ADEA8A423685}"/>
-          </ac:spMkLst>
-        </pc:spChg>
       </pc:sldChg>
       <pc:sldChg chg="addSp delSp modSp add del mod">
-        <pc:chgData name="Pramod Naik" userId="ceb6df04-ef15-4d9b-a141-998a03559d75" providerId="ADAL" clId="{62E9B5AE-779D-4001-92D3-8FF830A8A9C1}" dt="2025-10-11T09:21:42.223" v="622" actId="14100"/>
+        <pc:chgData name="Pramod Naik" userId="ceb6df04-ef15-4d9b-a141-998a03559d75" providerId="ADAL" clId="{62E9B5AE-779D-4001-92D3-8FF830A8A9C1}" dt="2025-10-26T05:53:41.772" v="2460" actId="2696"/>
         <pc:sldMkLst>
           <pc:docMk/>
           <pc:sldMk cId="1417320102" sldId="313"/>
         </pc:sldMkLst>
-        <pc:spChg chg="mod">
-          <ac:chgData name="Pramod Naik" userId="ceb6df04-ef15-4d9b-a141-998a03559d75" providerId="ADAL" clId="{62E9B5AE-779D-4001-92D3-8FF830A8A9C1}" dt="2025-10-11T09:21:37.551" v="621" actId="113"/>
-          <ac:spMkLst>
-            <pc:docMk/>
-            <pc:sldMk cId="1417320102" sldId="313"/>
-            <ac:spMk id="3" creationId="{5A8A250C-3D0F-0849-B09B-2A4A159E4F65}"/>
-          </ac:spMkLst>
-        </pc:spChg>
-        <pc:picChg chg="add mod">
-          <ac:chgData name="Pramod Naik" userId="ceb6df04-ef15-4d9b-a141-998a03559d75" providerId="ADAL" clId="{62E9B5AE-779D-4001-92D3-8FF830A8A9C1}" dt="2025-10-11T09:21:42.223" v="622" actId="14100"/>
-          <ac:picMkLst>
-            <pc:docMk/>
-            <pc:sldMk cId="1417320102" sldId="313"/>
-            <ac:picMk id="4" creationId="{862EC868-096E-1036-F721-98E1B696015F}"/>
-          </ac:picMkLst>
-        </pc:picChg>
       </pc:sldChg>
       <pc:sldChg chg="addSp delSp modSp add del mod">
-        <pc:chgData name="Pramod Naik" userId="ceb6df04-ef15-4d9b-a141-998a03559d75" providerId="ADAL" clId="{62E9B5AE-779D-4001-92D3-8FF830A8A9C1}" dt="2025-10-11T09:23:12.681" v="648" actId="1076"/>
+        <pc:chgData name="Pramod Naik" userId="ceb6df04-ef15-4d9b-a141-998a03559d75" providerId="ADAL" clId="{62E9B5AE-779D-4001-92D3-8FF830A8A9C1}" dt="2025-10-26T05:53:41.772" v="2460" actId="2696"/>
         <pc:sldMkLst>
           <pc:docMk/>
           <pc:sldMk cId="4187949477" sldId="314"/>
         </pc:sldMkLst>
-        <pc:spChg chg="mod">
-          <ac:chgData name="Pramod Naik" userId="ceb6df04-ef15-4d9b-a141-998a03559d75" providerId="ADAL" clId="{62E9B5AE-779D-4001-92D3-8FF830A8A9C1}" dt="2025-10-11T09:23:06.653" v="646" actId="113"/>
-          <ac:spMkLst>
-            <pc:docMk/>
-            <pc:sldMk cId="4187949477" sldId="314"/>
-            <ac:spMk id="3" creationId="{34B2F09B-BF8C-E7A1-F92A-B9BA6E8F6B80}"/>
-          </ac:spMkLst>
-        </pc:spChg>
-        <pc:picChg chg="add mod">
-          <ac:chgData name="Pramod Naik" userId="ceb6df04-ef15-4d9b-a141-998a03559d75" providerId="ADAL" clId="{62E9B5AE-779D-4001-92D3-8FF830A8A9C1}" dt="2025-10-11T09:23:12.681" v="648" actId="1076"/>
-          <ac:picMkLst>
-            <pc:docMk/>
-            <pc:sldMk cId="4187949477" sldId="314"/>
-            <ac:picMk id="4" creationId="{835B45A3-F628-52D3-93CA-9E1753955076}"/>
-          </ac:picMkLst>
-        </pc:picChg>
-        <pc:picChg chg="add mod">
-          <ac:chgData name="Pramod Naik" userId="ceb6df04-ef15-4d9b-a141-998a03559d75" providerId="ADAL" clId="{62E9B5AE-779D-4001-92D3-8FF830A8A9C1}" dt="2025-10-11T09:22:59.784" v="644" actId="1076"/>
-          <ac:picMkLst>
-            <pc:docMk/>
-            <pc:sldMk cId="4187949477" sldId="314"/>
-            <ac:picMk id="7" creationId="{463A86F6-7BC4-038F-26CA-0FBD16F69649}"/>
-          </ac:picMkLst>
-        </pc:picChg>
       </pc:sldChg>
       <pc:sldChg chg="modSp add del mod">
-        <pc:chgData name="Pramod Naik" userId="ceb6df04-ef15-4d9b-a141-998a03559d75" providerId="ADAL" clId="{62E9B5AE-779D-4001-92D3-8FF830A8A9C1}" dt="2025-10-11T09:25:08.182" v="752" actId="20577"/>
+        <pc:chgData name="Pramod Naik" userId="ceb6df04-ef15-4d9b-a141-998a03559d75" providerId="ADAL" clId="{62E9B5AE-779D-4001-92D3-8FF830A8A9C1}" dt="2025-10-26T05:53:41.772" v="2460" actId="2696"/>
         <pc:sldMkLst>
           <pc:docMk/>
           <pc:sldMk cId="250238104" sldId="315"/>
         </pc:sldMkLst>
-        <pc:spChg chg="mod">
-          <ac:chgData name="Pramod Naik" userId="ceb6df04-ef15-4d9b-a141-998a03559d75" providerId="ADAL" clId="{62E9B5AE-779D-4001-92D3-8FF830A8A9C1}" dt="2025-10-11T09:25:08.182" v="752" actId="20577"/>
-          <ac:spMkLst>
-            <pc:docMk/>
-            <pc:sldMk cId="250238104" sldId="315"/>
-            <ac:spMk id="3" creationId="{B7F95E68-7228-F472-D99B-68B070A9BCA7}"/>
-          </ac:spMkLst>
-        </pc:spChg>
       </pc:sldChg>
       <pc:sldChg chg="add del">
         <pc:chgData name="Pramod Naik" userId="ceb6df04-ef15-4d9b-a141-998a03559d75" providerId="ADAL" clId="{62E9B5AE-779D-4001-92D3-8FF830A8A9C1}" dt="2025-10-11T09:27:23.701" v="797" actId="47"/>
@@ -428,43 +324,11 @@
         </pc:sldMkLst>
       </pc:sldChg>
       <pc:sldChg chg="addSp delSp modSp add del mod">
-        <pc:chgData name="Pramod Naik" userId="ceb6df04-ef15-4d9b-a141-998a03559d75" providerId="ADAL" clId="{62E9B5AE-779D-4001-92D3-8FF830A8A9C1}" dt="2025-10-11T10:33:00.945" v="800" actId="1076"/>
+        <pc:chgData name="Pramod Naik" userId="ceb6df04-ef15-4d9b-a141-998a03559d75" providerId="ADAL" clId="{62E9B5AE-779D-4001-92D3-8FF830A8A9C1}" dt="2025-10-26T05:53:41.772" v="2460" actId="2696"/>
         <pc:sldMkLst>
           <pc:docMk/>
           <pc:sldMk cId="3306552090" sldId="320"/>
         </pc:sldMkLst>
-        <pc:spChg chg="mod">
-          <ac:chgData name="Pramod Naik" userId="ceb6df04-ef15-4d9b-a141-998a03559d75" providerId="ADAL" clId="{62E9B5AE-779D-4001-92D3-8FF830A8A9C1}" dt="2025-10-11T09:27:16.192" v="796" actId="113"/>
-          <ac:spMkLst>
-            <pc:docMk/>
-            <pc:sldMk cId="3306552090" sldId="320"/>
-            <ac:spMk id="3" creationId="{85CFF317-E40F-0D99-8488-5F3F39D3064B}"/>
-          </ac:spMkLst>
-        </pc:spChg>
-        <pc:picChg chg="add mod">
-          <ac:chgData name="Pramod Naik" userId="ceb6df04-ef15-4d9b-a141-998a03559d75" providerId="ADAL" clId="{62E9B5AE-779D-4001-92D3-8FF830A8A9C1}" dt="2025-10-11T09:26:30.265" v="763" actId="1076"/>
-          <ac:picMkLst>
-            <pc:docMk/>
-            <pc:sldMk cId="3306552090" sldId="320"/>
-            <ac:picMk id="6" creationId="{AC525010-61D2-60D1-1669-58F08CACBC88}"/>
-          </ac:picMkLst>
-        </pc:picChg>
-        <pc:picChg chg="add mod">
-          <ac:chgData name="Pramod Naik" userId="ceb6df04-ef15-4d9b-a141-998a03559d75" providerId="ADAL" clId="{62E9B5AE-779D-4001-92D3-8FF830A8A9C1}" dt="2025-10-11T09:27:12.034" v="795" actId="14100"/>
-          <ac:picMkLst>
-            <pc:docMk/>
-            <pc:sldMk cId="3306552090" sldId="320"/>
-            <ac:picMk id="9" creationId="{48D8ADC6-7662-1F3B-FDAC-9080CF7CD0B8}"/>
-          </ac:picMkLst>
-        </pc:picChg>
-        <pc:picChg chg="add mod">
-          <ac:chgData name="Pramod Naik" userId="ceb6df04-ef15-4d9b-a141-998a03559d75" providerId="ADAL" clId="{62E9B5AE-779D-4001-92D3-8FF830A8A9C1}" dt="2025-10-11T10:33:00.945" v="800" actId="1076"/>
-          <ac:picMkLst>
-            <pc:docMk/>
-            <pc:sldMk cId="3306552090" sldId="320"/>
-            <ac:picMk id="11" creationId="{D425886E-A48C-411D-63E6-05E692E0CD12}"/>
-          </ac:picMkLst>
-        </pc:picChg>
       </pc:sldChg>
       <pc:sldChg chg="del">
         <pc:chgData name="Pramod Naik" userId="ceb6df04-ef15-4d9b-a141-998a03559d75" providerId="ADAL" clId="{62E9B5AE-779D-4001-92D3-8FF830A8A9C1}" dt="2025-09-20T10:43:09.139" v="247" actId="47"/>
@@ -793,6 +657,20 @@
         </pc:spChg>
       </pc:sldChg>
       <pc:sldChg chg="del">
+        <pc:chgData name="Pramod Naik" userId="ceb6df04-ef15-4d9b-a141-998a03559d75" providerId="ADAL" clId="{62E9B5AE-779D-4001-92D3-8FF830A8A9C1}" dt="2025-10-24T05:14:48.062" v="2374" actId="47"/>
+        <pc:sldMkLst>
+          <pc:docMk/>
+          <pc:sldMk cId="3183652202" sldId="530"/>
+        </pc:sldMkLst>
+      </pc:sldChg>
+      <pc:sldChg chg="add del">
+        <pc:chgData name="Pramod Naik" userId="ceb6df04-ef15-4d9b-a141-998a03559d75" providerId="ADAL" clId="{62E9B5AE-779D-4001-92D3-8FF830A8A9C1}" dt="2025-10-24T05:15:04.968" v="2384" actId="47"/>
+        <pc:sldMkLst>
+          <pc:docMk/>
+          <pc:sldMk cId="2647842385" sldId="531"/>
+        </pc:sldMkLst>
+      </pc:sldChg>
+      <pc:sldChg chg="del">
         <pc:chgData name="Pramod Naik" userId="ceb6df04-ef15-4d9b-a141-998a03559d75" providerId="ADAL" clId="{62E9B5AE-779D-4001-92D3-8FF830A8A9C1}" dt="2025-09-20T10:39:41.716" v="180" actId="47"/>
         <pc:sldMkLst>
           <pc:docMk/>
@@ -806,11 +684,39 @@
           <pc:sldMk cId="535661125" sldId="532"/>
         </pc:sldMkLst>
       </pc:sldChg>
+      <pc:sldChg chg="add del">
+        <pc:chgData name="Pramod Naik" userId="ceb6df04-ef15-4d9b-a141-998a03559d75" providerId="ADAL" clId="{62E9B5AE-779D-4001-92D3-8FF830A8A9C1}" dt="2025-10-26T05:51:04.411" v="2459" actId="47"/>
+        <pc:sldMkLst>
+          <pc:docMk/>
+          <pc:sldMk cId="3892924958" sldId="532"/>
+        </pc:sldMkLst>
+      </pc:sldChg>
+      <pc:sldChg chg="add del">
+        <pc:chgData name="Pramod Naik" userId="ceb6df04-ef15-4d9b-a141-998a03559d75" providerId="ADAL" clId="{62E9B5AE-779D-4001-92D3-8FF830A8A9C1}" dt="2025-10-26T05:51:03.218" v="2458" actId="47"/>
+        <pc:sldMkLst>
+          <pc:docMk/>
+          <pc:sldMk cId="208792046" sldId="533"/>
+        </pc:sldMkLst>
+      </pc:sldChg>
       <pc:sldChg chg="del">
         <pc:chgData name="Pramod Naik" userId="ceb6df04-ef15-4d9b-a141-998a03559d75" providerId="ADAL" clId="{62E9B5AE-779D-4001-92D3-8FF830A8A9C1}" dt="2025-09-20T10:41:46.678" v="213" actId="47"/>
         <pc:sldMkLst>
           <pc:docMk/>
           <pc:sldMk cId="813065072" sldId="534"/>
+        </pc:sldMkLst>
+      </pc:sldChg>
+      <pc:sldChg chg="add del">
+        <pc:chgData name="Pramod Naik" userId="ceb6df04-ef15-4d9b-a141-998a03559d75" providerId="ADAL" clId="{62E9B5AE-779D-4001-92D3-8FF830A8A9C1}" dt="2025-10-26T05:51:02.666" v="2457" actId="47"/>
+        <pc:sldMkLst>
+          <pc:docMk/>
+          <pc:sldMk cId="948425043" sldId="534"/>
+        </pc:sldMkLst>
+      </pc:sldChg>
+      <pc:sldChg chg="add del">
+        <pc:chgData name="Pramod Naik" userId="ceb6df04-ef15-4d9b-a141-998a03559d75" providerId="ADAL" clId="{62E9B5AE-779D-4001-92D3-8FF830A8A9C1}" dt="2025-10-26T05:51:01.972" v="2456" actId="47"/>
+        <pc:sldMkLst>
+          <pc:docMk/>
+          <pc:sldMk cId="2261098285" sldId="535"/>
         </pc:sldMkLst>
       </pc:sldChg>
       <pc:sldChg chg="del">
@@ -1024,7 +930,7 @@
         </pc:picChg>
       </pc:sldChg>
       <pc:sldChg chg="addSp modSp add del mod">
-        <pc:chgData name="Pramod Naik" userId="ceb6df04-ef15-4d9b-a141-998a03559d75" providerId="ADAL" clId="{62E9B5AE-779D-4001-92D3-8FF830A8A9C1}" dt="2025-10-20T06:10:45.613" v="2069" actId="403"/>
+        <pc:chgData name="Pramod Naik" userId="ceb6df04-ef15-4d9b-a141-998a03559d75" providerId="ADAL" clId="{62E9B5AE-779D-4001-92D3-8FF830A8A9C1}" dt="2025-10-24T06:22:40.404" v="2400" actId="113"/>
         <pc:sldMkLst>
           <pc:docMk/>
           <pc:sldMk cId="1636630037" sldId="543"/>
@@ -1038,7 +944,7 @@
           </ac:spMkLst>
         </pc:spChg>
         <pc:graphicFrameChg chg="add mod modGraphic">
-          <ac:chgData name="Pramod Naik" userId="ceb6df04-ef15-4d9b-a141-998a03559d75" providerId="ADAL" clId="{62E9B5AE-779D-4001-92D3-8FF830A8A9C1}" dt="2025-10-20T06:10:43.848" v="2068" actId="1076"/>
+          <ac:chgData name="Pramod Naik" userId="ceb6df04-ef15-4d9b-a141-998a03559d75" providerId="ADAL" clId="{62E9B5AE-779D-4001-92D3-8FF830A8A9C1}" dt="2025-10-24T06:22:40.404" v="2400" actId="113"/>
           <ac:graphicFrameMkLst>
             <pc:docMk/>
             <pc:sldMk cId="1636630037" sldId="543"/>
@@ -1054,13 +960,13 @@
         </pc:sldMkLst>
       </pc:sldChg>
       <pc:sldChg chg="addSp modSp add del mod">
-        <pc:chgData name="Pramod Naik" userId="ceb6df04-ef15-4d9b-a141-998a03559d75" providerId="ADAL" clId="{62E9B5AE-779D-4001-92D3-8FF830A8A9C1}" dt="2025-10-20T06:11:54.130" v="2089" actId="207"/>
+        <pc:chgData name="Pramod Naik" userId="ceb6df04-ef15-4d9b-a141-998a03559d75" providerId="ADAL" clId="{62E9B5AE-779D-4001-92D3-8FF830A8A9C1}" dt="2025-10-24T06:23:46.681" v="2401" actId="113"/>
         <pc:sldMkLst>
           <pc:docMk/>
           <pc:sldMk cId="3112172767" sldId="544"/>
         </pc:sldMkLst>
         <pc:spChg chg="mod">
-          <ac:chgData name="Pramod Naik" userId="ceb6df04-ef15-4d9b-a141-998a03559d75" providerId="ADAL" clId="{62E9B5AE-779D-4001-92D3-8FF830A8A9C1}" dt="2025-10-20T06:11:54.130" v="2089" actId="207"/>
+          <ac:chgData name="Pramod Naik" userId="ceb6df04-ef15-4d9b-a141-998a03559d75" providerId="ADAL" clId="{62E9B5AE-779D-4001-92D3-8FF830A8A9C1}" dt="2025-10-24T06:23:46.681" v="2401" actId="113"/>
           <ac:spMkLst>
             <pc:docMk/>
             <pc:sldMk cId="3112172767" sldId="544"/>
@@ -1083,13 +989,13 @@
         </pc:sldMkLst>
       </pc:sldChg>
       <pc:sldChg chg="addSp modSp add del mod">
-        <pc:chgData name="Pramod Naik" userId="ceb6df04-ef15-4d9b-a141-998a03559d75" providerId="ADAL" clId="{62E9B5AE-779D-4001-92D3-8FF830A8A9C1}" dt="2025-10-14T05:59:03.364" v="1960" actId="1076"/>
+        <pc:chgData name="Pramod Naik" userId="ceb6df04-ef15-4d9b-a141-998a03559d75" providerId="ADAL" clId="{62E9B5AE-779D-4001-92D3-8FF830A8A9C1}" dt="2025-10-24T06:26:06.013" v="2405" actId="113"/>
         <pc:sldMkLst>
           <pc:docMk/>
           <pc:sldMk cId="1701663649" sldId="545"/>
         </pc:sldMkLst>
         <pc:spChg chg="mod">
-          <ac:chgData name="Pramod Naik" userId="ceb6df04-ef15-4d9b-a141-998a03559d75" providerId="ADAL" clId="{62E9B5AE-779D-4001-92D3-8FF830A8A9C1}" dt="2025-10-14T05:58:52.949" v="1958" actId="12"/>
+          <ac:chgData name="Pramod Naik" userId="ceb6df04-ef15-4d9b-a141-998a03559d75" providerId="ADAL" clId="{62E9B5AE-779D-4001-92D3-8FF830A8A9C1}" dt="2025-10-24T06:26:06.013" v="2405" actId="113"/>
           <ac:spMkLst>
             <pc:docMk/>
             <pc:sldMk cId="1701663649" sldId="545"/>
@@ -1477,13 +1383,13 @@
         </pc:spChg>
       </pc:sldChg>
       <pc:sldChg chg="addSp modSp add mod">
-        <pc:chgData name="Pramod Naik" userId="ceb6df04-ef15-4d9b-a141-998a03559d75" providerId="ADAL" clId="{62E9B5AE-779D-4001-92D3-8FF830A8A9C1}" dt="2025-10-20T06:18:21.195" v="2163" actId="1076"/>
+        <pc:chgData name="Pramod Naik" userId="ceb6df04-ef15-4d9b-a141-998a03559d75" providerId="ADAL" clId="{62E9B5AE-779D-4001-92D3-8FF830A8A9C1}" dt="2025-10-24T06:31:12.609" v="2406" actId="403"/>
         <pc:sldMkLst>
           <pc:docMk/>
           <pc:sldMk cId="3246291351" sldId="563"/>
         </pc:sldMkLst>
         <pc:spChg chg="mod">
-          <ac:chgData name="Pramod Naik" userId="ceb6df04-ef15-4d9b-a141-998a03559d75" providerId="ADAL" clId="{62E9B5AE-779D-4001-92D3-8FF830A8A9C1}" dt="2025-10-20T06:18:17.329" v="2162" actId="20577"/>
+          <ac:chgData name="Pramod Naik" userId="ceb6df04-ef15-4d9b-a141-998a03559d75" providerId="ADAL" clId="{62E9B5AE-779D-4001-92D3-8FF830A8A9C1}" dt="2025-10-24T06:31:12.609" v="2406" actId="403"/>
           <ac:spMkLst>
             <pc:docMk/>
             <pc:sldMk cId="3246291351" sldId="563"/>
@@ -1536,14 +1442,6 @@
             <ac:spMk id="3" creationId="{1048E3DD-AAA6-B500-A102-4FA4311B1A32}"/>
           </ac:spMkLst>
         </pc:spChg>
-        <pc:picChg chg="add del mod">
-          <ac:chgData name="Pramod Naik" userId="ceb6df04-ef15-4d9b-a141-998a03559d75" providerId="ADAL" clId="{62E9B5AE-779D-4001-92D3-8FF830A8A9C1}" dt="2025-10-20T06:17:59.914" v="2155" actId="478"/>
-          <ac:picMkLst>
-            <pc:docMk/>
-            <pc:sldMk cId="494025414" sldId="565"/>
-            <ac:picMk id="4" creationId="{EF3DB501-F286-D0DC-A2E2-31D20C7F9347}"/>
-          </ac:picMkLst>
-        </pc:picChg>
         <pc:picChg chg="add mod">
           <ac:chgData name="Pramod Naik" userId="ceb6df04-ef15-4d9b-a141-998a03559d75" providerId="ADAL" clId="{62E9B5AE-779D-4001-92D3-8FF830A8A9C1}" dt="2025-10-20T06:20:15.969" v="2170" actId="1076"/>
           <ac:picMkLst>
@@ -1554,13 +1452,13 @@
         </pc:picChg>
       </pc:sldChg>
       <pc:sldChg chg="addSp modSp add mod">
-        <pc:chgData name="Pramod Naik" userId="ceb6df04-ef15-4d9b-a141-998a03559d75" providerId="ADAL" clId="{62E9B5AE-779D-4001-92D3-8FF830A8A9C1}" dt="2025-10-20T06:21:32.839" v="2198" actId="403"/>
+        <pc:chgData name="Pramod Naik" userId="ceb6df04-ef15-4d9b-a141-998a03559d75" providerId="ADAL" clId="{62E9B5AE-779D-4001-92D3-8FF830A8A9C1}" dt="2025-10-24T06:59:27.519" v="2407" actId="113"/>
         <pc:sldMkLst>
           <pc:docMk/>
           <pc:sldMk cId="4083528472" sldId="566"/>
         </pc:sldMkLst>
         <pc:spChg chg="mod">
-          <ac:chgData name="Pramod Naik" userId="ceb6df04-ef15-4d9b-a141-998a03559d75" providerId="ADAL" clId="{62E9B5AE-779D-4001-92D3-8FF830A8A9C1}" dt="2025-10-20T06:21:32.839" v="2198" actId="403"/>
+          <ac:chgData name="Pramod Naik" userId="ceb6df04-ef15-4d9b-a141-998a03559d75" providerId="ADAL" clId="{62E9B5AE-779D-4001-92D3-8FF830A8A9C1}" dt="2025-10-24T06:59:27.519" v="2407" actId="113"/>
           <ac:spMkLst>
             <pc:docMk/>
             <pc:sldMk cId="4083528472" sldId="566"/>
@@ -1608,13 +1506,13 @@
         </pc:picChg>
       </pc:sldChg>
       <pc:sldChg chg="modSp add mod">
-        <pc:chgData name="Pramod Naik" userId="ceb6df04-ef15-4d9b-a141-998a03559d75" providerId="ADAL" clId="{62E9B5AE-779D-4001-92D3-8FF830A8A9C1}" dt="2025-10-20T06:51:24.826" v="2312" actId="14100"/>
+        <pc:chgData name="Pramod Naik" userId="ceb6df04-ef15-4d9b-a141-998a03559d75" providerId="ADAL" clId="{62E9B5AE-779D-4001-92D3-8FF830A8A9C1}" dt="2025-10-24T07:03:22.004" v="2411" actId="404"/>
         <pc:sldMkLst>
           <pc:docMk/>
           <pc:sldMk cId="1668062704" sldId="568"/>
         </pc:sldMkLst>
         <pc:spChg chg="mod">
-          <ac:chgData name="Pramod Naik" userId="ceb6df04-ef15-4d9b-a141-998a03559d75" providerId="ADAL" clId="{62E9B5AE-779D-4001-92D3-8FF830A8A9C1}" dt="2025-10-20T06:51:24.826" v="2312" actId="14100"/>
+          <ac:chgData name="Pramod Naik" userId="ceb6df04-ef15-4d9b-a141-998a03559d75" providerId="ADAL" clId="{62E9B5AE-779D-4001-92D3-8FF830A8A9C1}" dt="2025-10-24T07:03:22.004" v="2411" actId="404"/>
           <ac:spMkLst>
             <pc:docMk/>
             <pc:sldMk cId="1668062704" sldId="568"/>
@@ -1623,13 +1521,13 @@
         </pc:spChg>
       </pc:sldChg>
       <pc:sldChg chg="addSp modSp add mod">
-        <pc:chgData name="Pramod Naik" userId="ceb6df04-ef15-4d9b-a141-998a03559d75" providerId="ADAL" clId="{62E9B5AE-779D-4001-92D3-8FF830A8A9C1}" dt="2025-10-20T06:42:13.836" v="2258" actId="12"/>
+        <pc:chgData name="Pramod Naik" userId="ceb6df04-ef15-4d9b-a141-998a03559d75" providerId="ADAL" clId="{62E9B5AE-779D-4001-92D3-8FF830A8A9C1}" dt="2025-10-24T07:03:57.351" v="2455" actId="1076"/>
         <pc:sldMkLst>
           <pc:docMk/>
           <pc:sldMk cId="959162173" sldId="569"/>
         </pc:sldMkLst>
         <pc:spChg chg="mod">
-          <ac:chgData name="Pramod Naik" userId="ceb6df04-ef15-4d9b-a141-998a03559d75" providerId="ADAL" clId="{62E9B5AE-779D-4001-92D3-8FF830A8A9C1}" dt="2025-10-20T06:42:13.836" v="2258" actId="12"/>
+          <ac:chgData name="Pramod Naik" userId="ceb6df04-ef15-4d9b-a141-998a03559d75" providerId="ADAL" clId="{62E9B5AE-779D-4001-92D3-8FF830A8A9C1}" dt="2025-10-24T07:03:54.292" v="2454" actId="20577"/>
           <ac:spMkLst>
             <pc:docMk/>
             <pc:sldMk cId="959162173" sldId="569"/>
@@ -1637,7 +1535,7 @@
           </ac:spMkLst>
         </pc:spChg>
         <pc:picChg chg="add mod">
-          <ac:chgData name="Pramod Naik" userId="ceb6df04-ef15-4d9b-a141-998a03559d75" providerId="ADAL" clId="{62E9B5AE-779D-4001-92D3-8FF830A8A9C1}" dt="2025-10-20T06:42:11.095" v="2257" actId="1076"/>
+          <ac:chgData name="Pramod Naik" userId="ceb6df04-ef15-4d9b-a141-998a03559d75" providerId="ADAL" clId="{62E9B5AE-779D-4001-92D3-8FF830A8A9C1}" dt="2025-10-24T07:03:57.351" v="2455" actId="1076"/>
           <ac:picMkLst>
             <pc:docMk/>
             <pc:sldMk cId="959162173" sldId="569"/>
@@ -1657,14 +1555,6 @@
             <pc:docMk/>
             <pc:sldMk cId="3252099199" sldId="570"/>
             <ac:spMk id="3" creationId="{17D02728-909D-A8D7-132C-3E3F4FF884F5}"/>
-          </ac:spMkLst>
-        </pc:spChg>
-        <pc:spChg chg="add">
-          <ac:chgData name="Pramod Naik" userId="ceb6df04-ef15-4d9b-a141-998a03559d75" providerId="ADAL" clId="{62E9B5AE-779D-4001-92D3-8FF830A8A9C1}" dt="2025-10-20T06:44:40.423" v="2299"/>
-          <ac:spMkLst>
-            <pc:docMk/>
-            <pc:sldMk cId="3252099199" sldId="570"/>
-            <ac:spMk id="7" creationId="{B01A3B95-7B3F-E478-8C56-D551ACCDDE39}"/>
           </ac:spMkLst>
         </pc:spChg>
         <pc:picChg chg="add mod">
@@ -1698,14 +1588,6 @@
             <ac:spMk id="3" creationId="{2649D20D-C1FE-2E43-B437-7EBDEFC2FBDD}"/>
           </ac:spMkLst>
         </pc:spChg>
-        <pc:picChg chg="add del mod">
-          <ac:chgData name="Pramod Naik" userId="ceb6df04-ef15-4d9b-a141-998a03559d75" providerId="ADAL" clId="{62E9B5AE-779D-4001-92D3-8FF830A8A9C1}" dt="2025-10-20T06:58:27.716" v="2328" actId="478"/>
-          <ac:picMkLst>
-            <pc:docMk/>
-            <pc:sldMk cId="1073918120" sldId="571"/>
-            <ac:picMk id="4" creationId="{228486B7-D9AF-54B1-78B5-AD96C223733C}"/>
-          </ac:picMkLst>
-        </pc:picChg>
         <pc:picChg chg="add mod">
           <ac:chgData name="Pramod Naik" userId="ceb6df04-ef15-4d9b-a141-998a03559d75" providerId="ADAL" clId="{62E9B5AE-779D-4001-92D3-8FF830A8A9C1}" dt="2025-10-20T06:58:32.389" v="2331" actId="1076"/>
           <ac:picMkLst>
@@ -1784,22 +1666,22 @@
           </ac:picMkLst>
         </pc:picChg>
       </pc:sldChg>
-      <pc:sldChg chg="add">
-        <pc:chgData name="Pramod Naik" userId="ceb6df04-ef15-4d9b-a141-998a03559d75" providerId="ADAL" clId="{62E9B5AE-779D-4001-92D3-8FF830A8A9C1}" dt="2025-10-20T07:01:40.749" v="2348"/>
+      <pc:sldChg chg="add del">
+        <pc:chgData name="Pramod Naik" userId="ceb6df04-ef15-4d9b-a141-998a03559d75" providerId="ADAL" clId="{62E9B5AE-779D-4001-92D3-8FF830A8A9C1}" dt="2025-10-24T05:15:08.428" v="2385" actId="47"/>
         <pc:sldMkLst>
           <pc:docMk/>
           <pc:sldMk cId="1438792373" sldId="575"/>
         </pc:sldMkLst>
       </pc:sldChg>
-      <pc:sldChg chg="add">
-        <pc:chgData name="Pramod Naik" userId="ceb6df04-ef15-4d9b-a141-998a03559d75" providerId="ADAL" clId="{62E9B5AE-779D-4001-92D3-8FF830A8A9C1}" dt="2025-10-20T07:01:40.937" v="2349"/>
+      <pc:sldChg chg="add del">
+        <pc:chgData name="Pramod Naik" userId="ceb6df04-ef15-4d9b-a141-998a03559d75" providerId="ADAL" clId="{62E9B5AE-779D-4001-92D3-8FF830A8A9C1}" dt="2025-10-24T05:15:09.265" v="2386" actId="47"/>
         <pc:sldMkLst>
           <pc:docMk/>
           <pc:sldMk cId="34796182" sldId="576"/>
         </pc:sldMkLst>
       </pc:sldChg>
-      <pc:sldChg chg="add">
-        <pc:chgData name="Pramod Naik" userId="ceb6df04-ef15-4d9b-a141-998a03559d75" providerId="ADAL" clId="{62E9B5AE-779D-4001-92D3-8FF830A8A9C1}" dt="2025-10-20T07:01:41.095" v="2350"/>
+      <pc:sldChg chg="add del">
+        <pc:chgData name="Pramod Naik" userId="ceb6df04-ef15-4d9b-a141-998a03559d75" providerId="ADAL" clId="{62E9B5AE-779D-4001-92D3-8FF830A8A9C1}" dt="2025-10-24T05:15:10.215" v="2387" actId="47"/>
         <pc:sldMkLst>
           <pc:docMk/>
           <pc:sldMk cId="2734079874" sldId="577"/>
@@ -1819,14 +1701,6 @@
             <ac:spMk id="3" creationId="{D2156EB7-C1B5-D782-E7FA-9865194111E5}"/>
           </ac:spMkLst>
         </pc:spChg>
-        <pc:picChg chg="add del mod ord">
-          <ac:chgData name="Pramod Naik" userId="ceb6df04-ef15-4d9b-a141-998a03559d75" providerId="ADAL" clId="{62E9B5AE-779D-4001-92D3-8FF830A8A9C1}" dt="2025-10-20T07:02:49.298" v="2361" actId="22"/>
-          <ac:picMkLst>
-            <pc:docMk/>
-            <pc:sldMk cId="2851575667" sldId="578"/>
-            <ac:picMk id="4" creationId="{3FFE893E-250D-0365-86E6-06BB01421F00}"/>
-          </ac:picMkLst>
-        </pc:picChg>
         <pc:picChg chg="add mod">
           <ac:chgData name="Pramod Naik" userId="ceb6df04-ef15-4d9b-a141-998a03559d75" providerId="ADAL" clId="{62E9B5AE-779D-4001-92D3-8FF830A8A9C1}" dt="2025-10-20T07:02:57.366" v="2366" actId="1076"/>
           <ac:picMkLst>
@@ -2011,7 +1885,7 @@
           <a:p>
             <a:fld id="{61532AF1-4615-4667-912A-829B12F8C4D2}" type="datetimeFigureOut">
               <a:rPr lang="en-IN" smtClean="0"/>
-              <a:t>20-10-2025</a:t>
+              <a:t>26-10-2025</a:t>
             </a:fld>
             <a:endParaRPr lang="en-IN"/>
           </a:p>
@@ -2428,7 +2302,7 @@
           <a:p>
             <a:fld id="{C43A76A3-ADC8-4477-8FC1-B9DD55D84908}" type="datetime1">
               <a:rPr lang="en-US" smtClean="0"/>
-              <a:t>10/20/2025</a:t>
+              <a:t>10/26/2025</a:t>
             </a:fld>
             <a:endParaRPr lang="en-US" dirty="0"/>
           </a:p>
@@ -2626,7 +2500,7 @@
           <a:p>
             <a:fld id="{D6762538-DC4D-4667-96E5-B3278DDF8B12}" type="datetime1">
               <a:rPr lang="en-US" smtClean="0"/>
-              <a:t>10/20/2025</a:t>
+              <a:t>10/26/2025</a:t>
             </a:fld>
             <a:endParaRPr lang="en-US"/>
           </a:p>
@@ -2834,7 +2708,7 @@
           <a:p>
             <a:fld id="{05880548-5C08-4BE3-B63E-F2BB63B0B00C}" type="datetime1">
               <a:rPr lang="en-US" smtClean="0"/>
-              <a:t>10/20/2025</a:t>
+              <a:t>10/26/2025</a:t>
             </a:fld>
             <a:endParaRPr lang="en-US"/>
           </a:p>
@@ -3032,7 +2906,7 @@
           <a:p>
             <a:fld id="{DE7F49BE-398D-479A-8A7E-5DDBCA61EDCB}" type="datetime1">
               <a:rPr lang="en-US" smtClean="0"/>
-              <a:t>10/20/2025</a:t>
+              <a:t>10/26/2025</a:t>
             </a:fld>
             <a:endParaRPr lang="en-US" dirty="0"/>
           </a:p>
@@ -3308,7 +3182,7 @@
           <a:p>
             <a:fld id="{CCD0C193-4974-4A1F-9C63-07D595E30D66}" type="datetime1">
               <a:rPr lang="en-US" smtClean="0"/>
-              <a:t>10/20/2025</a:t>
+              <a:t>10/26/2025</a:t>
             </a:fld>
             <a:endParaRPr lang="en-US"/>
           </a:p>
@@ -3575,7 +3449,7 @@
           <a:p>
             <a:fld id="{701AA87F-28D4-4BF0-B81F-877A89DFD5AC}" type="datetime1">
               <a:rPr lang="en-US" smtClean="0"/>
-              <a:t>10/20/2025</a:t>
+              <a:t>10/26/2025</a:t>
             </a:fld>
             <a:endParaRPr lang="en-US"/>
           </a:p>
@@ -3989,7 +3863,7 @@
           <a:p>
             <a:fld id="{A8A9F1F3-208B-49A3-B337-9C8ACEB3E0E1}" type="datetime1">
               <a:rPr lang="en-US" smtClean="0"/>
-              <a:t>10/20/2025</a:t>
+              <a:t>10/26/2025</a:t>
             </a:fld>
             <a:endParaRPr lang="en-US"/>
           </a:p>
@@ -4136,7 +4010,7 @@
           <a:p>
             <a:fld id="{27AF6CA6-7293-4AA2-A0E0-A3BF4416E786}" type="datetime1">
               <a:rPr lang="en-US" smtClean="0"/>
-              <a:t>10/20/2025</a:t>
+              <a:t>10/26/2025</a:t>
             </a:fld>
             <a:endParaRPr lang="en-US"/>
           </a:p>
@@ -4249,7 +4123,7 @@
           <a:p>
             <a:fld id="{98D87016-7BCD-46FB-8EE3-AB6C369108B4}" type="datetime1">
               <a:rPr lang="en-US" smtClean="0"/>
-              <a:t>10/20/2025</a:t>
+              <a:t>10/26/2025</a:t>
             </a:fld>
             <a:endParaRPr lang="en-US"/>
           </a:p>
@@ -4568,7 +4442,7 @@
           <a:p>
             <a:fld id="{A1547011-1FFC-4EF8-9A2E-53B4AD2ADBD4}" type="datetime1">
               <a:rPr lang="en-US" smtClean="0"/>
-              <a:t>10/20/2025</a:t>
+              <a:t>10/26/2025</a:t>
             </a:fld>
             <a:endParaRPr lang="en-US"/>
           </a:p>
@@ -4863,7 +4737,7 @@
           <a:p>
             <a:fld id="{9562EB47-45B4-4EF5-A743-B4885DD2F060}" type="datetime1">
               <a:rPr lang="en-US" smtClean="0"/>
-              <a:t>10/20/2025</a:t>
+              <a:t>10/26/2025</a:t>
             </a:fld>
             <a:endParaRPr lang="en-US"/>
           </a:p>
@@ -6248,7 +6122,7 @@
           <a:p>
             <a:fld id="{4A8D24A4-5FEC-4062-8995-EB21925B3B40}" type="datetime1">
               <a:rPr lang="en-US" smtClean="0"/>
-              <a:t>10/20/2025</a:t>
+              <a:t>10/26/2025</a:t>
             </a:fld>
             <a:endParaRPr lang="en-US" sz="1000" dirty="0"/>
           </a:p>
@@ -9811,7 +9685,7 @@
                         <a:buNone/>
                       </a:pPr>
                       <a:r>
-                        <a:rPr lang="en-IN" sz="2000" b="1">
+                        <a:rPr lang="en-IN" sz="2000" b="1" dirty="0">
                           <a:solidFill>
                             <a:srgbClr val="C00000"/>
                           </a:solidFill>
@@ -9820,7 +9694,7 @@
                         </a:rPr>
                         <a:t>Starlette</a:t>
                       </a:r>
-                      <a:endParaRPr lang="en-IN" sz="2000">
+                      <a:endParaRPr lang="en-IN" sz="2000" dirty="0">
                         <a:solidFill>
                           <a:srgbClr val="C00000"/>
                         </a:solidFill>
@@ -9935,7 +9809,7 @@
                         <a:buNone/>
                       </a:pPr>
                       <a:r>
-                        <a:rPr lang="en-IN" sz="2000">
+                        <a:rPr lang="en-IN" sz="2000" dirty="0">
                           <a:effectLst/>
                           <a:latin typeface="Aptos" panose="020B0004020202020204" pitchFamily="34" charset="0"/>
                         </a:rPr>
@@ -10056,13 +9930,13 @@
                         <a:buNone/>
                       </a:pPr>
                       <a:r>
-                        <a:rPr lang="en-IN" sz="2000" b="1">
+                        <a:rPr lang="en-IN" sz="2000" b="1" dirty="0" err="1">
                           <a:effectLst/>
                           <a:latin typeface="Aptos" panose="020B0004020202020204" pitchFamily="34" charset="0"/>
                         </a:rPr>
                         <a:t>FastAPI</a:t>
                       </a:r>
-                      <a:endParaRPr lang="en-IN" sz="2000">
+                      <a:endParaRPr lang="en-IN" sz="2000" dirty="0">
                         <a:effectLst/>
                         <a:latin typeface="Aptos" panose="020B0004020202020204" pitchFamily="34" charset="0"/>
                       </a:endParaRPr>
@@ -10174,7 +10048,7 @@
                         <a:buNone/>
                       </a:pPr>
                       <a:r>
-                        <a:rPr lang="en-IN" sz="2000">
+                        <a:rPr lang="en-IN" sz="2000" dirty="0">
                           <a:effectLst/>
                           <a:latin typeface="Aptos" panose="020B0004020202020204" pitchFamily="34" charset="0"/>
                         </a:rPr>
@@ -10295,13 +10169,13 @@
                         <a:buNone/>
                       </a:pPr>
                       <a:r>
-                        <a:rPr lang="en-IN" sz="2000" b="1">
+                        <a:rPr lang="en-IN" sz="2000" b="1" dirty="0">
                           <a:effectLst/>
                           <a:latin typeface="Aptos" panose="020B0004020202020204" pitchFamily="34" charset="0"/>
                         </a:rPr>
                         <a:t>Flask</a:t>
                       </a:r>
-                      <a:endParaRPr lang="en-IN" sz="2000">
+                      <a:endParaRPr lang="en-IN" sz="2000" dirty="0">
                         <a:effectLst/>
                         <a:latin typeface="Aptos" panose="020B0004020202020204" pitchFamily="34" charset="0"/>
                       </a:endParaRPr>
@@ -10534,13 +10408,13 @@
                         <a:buNone/>
                       </a:pPr>
                       <a:r>
-                        <a:rPr lang="en-IN" sz="2000" b="1">
+                        <a:rPr lang="en-IN" sz="2000" b="1" dirty="0">
                           <a:effectLst/>
                           <a:latin typeface="Aptos" panose="020B0004020202020204" pitchFamily="34" charset="0"/>
                         </a:rPr>
                         <a:t>Django</a:t>
                       </a:r>
-                      <a:endParaRPr lang="en-IN" sz="2000">
+                      <a:endParaRPr lang="en-IN" sz="2000" dirty="0">
                         <a:effectLst/>
                         <a:latin typeface="Aptos" panose="020B0004020202020204" pitchFamily="34" charset="0"/>
                       </a:endParaRPr>
@@ -10773,13 +10647,13 @@
                         <a:buNone/>
                       </a:pPr>
                       <a:r>
-                        <a:rPr lang="en-IN" sz="2000" b="1">
+                        <a:rPr lang="en-IN" sz="2000" b="1" dirty="0">
                           <a:effectLst/>
                           <a:latin typeface="Aptos" panose="020B0004020202020204" pitchFamily="34" charset="0"/>
                         </a:rPr>
                         <a:t>Tornado</a:t>
                       </a:r>
-                      <a:endParaRPr lang="en-IN" sz="2000">
+                      <a:endParaRPr lang="en-IN" sz="2000" dirty="0">
                         <a:effectLst/>
                         <a:latin typeface="Aptos" panose="020B0004020202020204" pitchFamily="34" charset="0"/>
                       </a:endParaRPr>
@@ -12263,7 +12137,7 @@
                         <a:buNone/>
                       </a:pPr>
                       <a:r>
-                        <a:rPr lang="en-IN" sz="2000">
+                        <a:rPr lang="en-IN" sz="2000" dirty="0">
                           <a:effectLst/>
                           <a:latin typeface="Aptos" panose="020B0004020202020204" pitchFamily="34" charset="0"/>
                         </a:rPr>
@@ -12441,7 +12315,7 @@
                         <a:buNone/>
                       </a:pPr>
                       <a:r>
-                        <a:rPr lang="en-IN" sz="2000">
+                        <a:rPr lang="en-IN" sz="2000" dirty="0">
                           <a:effectLst/>
                           <a:latin typeface="Aptos" panose="020B0004020202020204" pitchFamily="34" charset="0"/>
                         </a:rPr>
@@ -12740,12 +12614,30 @@
                         <a:buNone/>
                       </a:pPr>
                       <a:r>
-                        <a:rPr lang="en-IN" sz="2000">
+                        <a:rPr lang="en-IN" sz="2000" dirty="0" err="1">
                           <a:effectLst/>
                           <a:latin typeface="Aptos" panose="020B0004020202020204" pitchFamily="34" charset="0"/>
                         </a:rPr>
-                        <a:t>Gunicorn, uWSGI</a:t>
+                        <a:t>Gunicorn</a:t>
                       </a:r>
+                      <a:r>
+                        <a:rPr lang="en-IN" sz="2000" dirty="0">
+                          <a:effectLst/>
+                          <a:latin typeface="Aptos" panose="020B0004020202020204" pitchFamily="34" charset="0"/>
+                        </a:rPr>
+                        <a:t>, </a:t>
+                      </a:r>
+                      <a:r>
+                        <a:rPr lang="en-IN" sz="2000" dirty="0" err="1">
+                          <a:effectLst/>
+                          <a:latin typeface="Aptos" panose="020B0004020202020204" pitchFamily="34" charset="0"/>
+                        </a:rPr>
+                        <a:t>uWSGI</a:t>
+                      </a:r>
+                      <a:endParaRPr lang="en-IN" sz="2000" dirty="0">
+                        <a:effectLst/>
+                        <a:latin typeface="Aptos" panose="020B0004020202020204" pitchFamily="34" charset="0"/>
+                      </a:endParaRPr>
                     </a:p>
                   </a:txBody>
                   <a:tcPr marL="50800" marR="50800" marT="50800" marB="50800">
@@ -12797,12 +12689,30 @@
                         <a:buNone/>
                       </a:pPr>
                       <a:r>
-                        <a:rPr lang="en-IN" sz="2000">
+                        <a:rPr lang="en-IN" sz="2000" dirty="0" err="1">
                           <a:effectLst/>
                           <a:latin typeface="Aptos" panose="020B0004020202020204" pitchFamily="34" charset="0"/>
                         </a:rPr>
-                        <a:t>Uvicorn, Daphne, Hypercorn</a:t>
+                        <a:t>Uvicorn</a:t>
                       </a:r>
+                      <a:r>
+                        <a:rPr lang="en-IN" sz="2000" dirty="0">
+                          <a:effectLst/>
+                          <a:latin typeface="Aptos" panose="020B0004020202020204" pitchFamily="34" charset="0"/>
+                        </a:rPr>
+                        <a:t>, Daphne, </a:t>
+                      </a:r>
+                      <a:r>
+                        <a:rPr lang="en-IN" sz="2000" dirty="0" err="1">
+                          <a:effectLst/>
+                          <a:latin typeface="Aptos" panose="020B0004020202020204" pitchFamily="34" charset="0"/>
+                        </a:rPr>
+                        <a:t>Hypercorn</a:t>
+                      </a:r>
+                      <a:endParaRPr lang="en-IN" sz="2000" dirty="0">
+                        <a:effectLst/>
+                        <a:latin typeface="Aptos" panose="020B0004020202020204" pitchFamily="34" charset="0"/>
+                      </a:endParaRPr>
                     </a:p>
                   </a:txBody>
                   <a:tcPr marL="50800" marR="50800" marT="50800" marB="50800">
@@ -12918,7 +12828,7 @@
                         <a:buNone/>
                       </a:pPr>
                       <a:r>
-                        <a:rPr lang="en-IN" sz="2000">
+                        <a:rPr lang="en-IN" sz="2000" dirty="0">
                           <a:effectLst/>
                           <a:latin typeface="Aptos" panose="020B0004020202020204" pitchFamily="34" charset="0"/>
                         </a:rPr>
@@ -15237,13 +15147,13 @@
                         <a:buNone/>
                       </a:pPr>
                       <a:r>
-                        <a:rPr lang="en-IN" sz="2400" b="1">
+                        <a:rPr lang="en-IN" sz="2400" b="1" dirty="0" err="1">
                           <a:effectLst/>
                           <a:latin typeface="Aptos" panose="020B0004020202020204" pitchFamily="34" charset="0"/>
                         </a:rPr>
                         <a:t>FastAPI</a:t>
                       </a:r>
-                      <a:endParaRPr lang="en-IN" sz="2400">
+                      <a:endParaRPr lang="en-IN" sz="2400" dirty="0">
                         <a:effectLst/>
                         <a:latin typeface="Aptos" panose="020B0004020202020204" pitchFamily="34" charset="0"/>
                       </a:endParaRPr>
@@ -16677,7 +16587,7 @@
           <p:nvPr>
             <p:extLst>
               <p:ext uri="{D42A27DB-BD31-4B8C-83A1-F6EECF244321}">
-                <p14:modId xmlns:p14="http://schemas.microsoft.com/office/powerpoint/2010/main" val="1639513610"/>
+                <p14:modId xmlns:p14="http://schemas.microsoft.com/office/powerpoint/2010/main" val="2305365994"/>
               </p:ext>
             </p:extLst>
           </p:nvPr>
@@ -16845,7 +16755,7 @@
                         <a:buNone/>
                       </a:pPr>
                       <a:r>
-                        <a:rPr lang="en-IN" sz="2400">
+                        <a:rPr lang="en-IN" sz="2400" dirty="0">
                           <a:effectLst/>
                           <a:latin typeface="Aptos" panose="020B0004020202020204" pitchFamily="34" charset="0"/>
                         </a:rPr>
@@ -17358,7 +17268,7 @@
                         <a:buNone/>
                       </a:pPr>
                       <a:r>
-                        <a:rPr lang="en-IN" sz="2400">
+                        <a:rPr lang="en-IN" sz="2400" dirty="0">
                           <a:effectLst/>
                           <a:latin typeface="Aptos" panose="020B0004020202020204" pitchFamily="34" charset="0"/>
                         </a:rPr>
@@ -17419,7 +17329,14 @@
                           <a:effectLst/>
                           <a:latin typeface="Aptos" panose="020B0004020202020204" pitchFamily="34" charset="0"/>
                         </a:rPr>
-                        <a:t>Swagger</a:t>
+                        <a:t>Swagger </a:t>
+                      </a:r>
+                      <a:r>
+                        <a:rPr lang="en-IN" sz="2400" b="0" dirty="0">
+                          <a:effectLst/>
+                          <a:latin typeface="Aptos" panose="020B0004020202020204" pitchFamily="34" charset="0"/>
+                        </a:rPr>
+                        <a:t>Docs</a:t>
                       </a:r>
                       <a:r>
                         <a:rPr lang="en-IN" sz="2400" dirty="0">
@@ -17648,7 +17565,7 @@
               <a:t>The request goes to the ASGI web server like </a:t>
             </a:r>
             <a:r>
-              <a:rPr lang="en-IN" sz="2400" dirty="0" err="1"/>
+              <a:rPr lang="en-IN" sz="2400" b="1" dirty="0" err="1"/>
               <a:t>Uvicorn</a:t>
             </a:r>
             <a:r>
@@ -17891,22 +17808,54 @@
             <a:pPr lvl="2" fontAlgn="ctr"/>
             <a:r>
               <a:rPr lang="en-IN" sz="2400" dirty="0"/>
-              <a:t>Matches the route (/items/{</a:t>
-            </a:r>
-            <a:r>
-              <a:rPr lang="en-IN" sz="2400" dirty="0" err="1"/>
+              <a:t>Matches the route </a:t>
+            </a:r>
+            <a:r>
+              <a:rPr lang="en-IN" sz="2400" b="1" dirty="0"/>
+              <a:t>(/items/{</a:t>
+            </a:r>
+            <a:r>
+              <a:rPr lang="en-IN" sz="2400" b="1" dirty="0" err="1"/>
               <a:t>item_id</a:t>
             </a:r>
             <a:r>
+              <a:rPr lang="en-IN" sz="2400" b="1" dirty="0"/>
+              <a:t>}) </a:t>
+            </a:r>
+            <a:r>
               <a:rPr lang="en-IN" sz="2400" dirty="0"/>
-              <a:t>}) using the HTTP method</a:t>
+              <a:t>using the HTTP method</a:t>
             </a:r>
           </a:p>
           <a:p>
             <a:pPr lvl="2" fontAlgn="ctr"/>
             <a:r>
               <a:rPr lang="en-IN" sz="2400" dirty="0"/>
-              <a:t>Prepares the request context (headers, query, path, etc.)</a:t>
+              <a:t>Prepares the request context (</a:t>
+            </a:r>
+            <a:r>
+              <a:rPr lang="en-IN" sz="2400" b="1" dirty="0"/>
+              <a:t>headers</a:t>
+            </a:r>
+            <a:r>
+              <a:rPr lang="en-IN" sz="2400" dirty="0"/>
+              <a:t>, </a:t>
+            </a:r>
+            <a:r>
+              <a:rPr lang="en-IN" sz="2400" b="1" dirty="0"/>
+              <a:t>query,</a:t>
+            </a:r>
+            <a:r>
+              <a:rPr lang="en-IN" sz="2400" dirty="0"/>
+              <a:t> </a:t>
+            </a:r>
+            <a:r>
+              <a:rPr lang="en-IN" sz="2400" b="1" dirty="0"/>
+              <a:t>path</a:t>
+            </a:r>
+            <a:r>
+              <a:rPr lang="en-IN" sz="2400" dirty="0"/>
+              <a:t>, etc.)</a:t>
             </a:r>
           </a:p>
           <a:p>
@@ -19765,7 +19714,7 @@
               <a:buNone/>
             </a:pPr>
             <a:r>
-              <a:rPr lang="en-IN" sz="2800" b="1" dirty="0" err="1">
+              <a:rPr lang="en-IN" sz="3200" b="1" dirty="0" err="1">
                 <a:solidFill>
                   <a:schemeClr val="accent2">
                     <a:lumMod val="75000"/>
@@ -19775,7 +19724,7 @@
               <a:t>Pydantic</a:t>
             </a:r>
             <a:r>
-              <a:rPr lang="en-IN" sz="2800" b="1" dirty="0">
+              <a:rPr lang="en-IN" sz="3200" b="1" dirty="0">
                 <a:solidFill>
                   <a:schemeClr val="accent2">
                     <a:lumMod val="75000"/>
@@ -20361,7 +20310,15 @@
             </a:r>
             <a:r>
               <a:rPr lang="en-US" sz="2400" dirty="0"/>
-              <a:t>"age"</a:t>
+              <a:t>"</a:t>
+            </a:r>
+            <a:r>
+              <a:rPr lang="en-US" sz="2400" b="1" dirty="0"/>
+              <a:t>age</a:t>
+            </a:r>
+            <a:r>
+              <a:rPr lang="en-US" sz="2400" dirty="0"/>
+              <a:t>"</a:t>
             </a:r>
             <a:r>
               <a:rPr lang="en-US" sz="2800" dirty="0"/>
@@ -20701,6 +20658,7 @@
             </a:r>
           </a:p>
           <a:p>
+            <a:pPr lvl="1"/>
             <a:r>
               <a:rPr lang="en-US" sz="2800" dirty="0"/>
               <a:t>Each attribute has a </a:t>
@@ -20718,7 +20676,7 @@
               <a:t>(like </a:t>
             </a:r>
             <a:r>
-              <a:rPr lang="en-US" b="1" dirty="0"/>
+              <a:rPr lang="en-US" sz="2000" b="1" dirty="0"/>
               <a:t>str</a:t>
             </a:r>
             <a:r>
@@ -20726,7 +20684,7 @@
               <a:t>, </a:t>
             </a:r>
             <a:r>
-              <a:rPr lang="en-US" b="1" dirty="0"/>
+              <a:rPr lang="en-US" sz="2000" b="1" dirty="0"/>
               <a:t>int</a:t>
             </a:r>
             <a:r>
@@ -20734,7 +20692,7 @@
               <a:t>, </a:t>
             </a:r>
             <a:r>
-              <a:rPr lang="en-US" b="1" dirty="0"/>
+              <a:rPr lang="en-US" sz="2000" b="1" dirty="0"/>
               <a:t>float</a:t>
             </a:r>
             <a:r>
@@ -20743,6 +20701,7 @@
             </a:r>
           </a:p>
           <a:p>
+            <a:pPr lvl="1"/>
             <a:r>
               <a:rPr lang="en-US" sz="2800" dirty="0" err="1"/>
               <a:t>Pydantic</a:t>
@@ -20761,6 +20720,7 @@
             </a:r>
           </a:p>
           <a:p>
+            <a:pPr lvl="1"/>
             <a:r>
               <a:rPr lang="en-US" sz="2800" dirty="0"/>
               <a:t>You get </a:t>
@@ -20873,11 +20833,14 @@
           <a:p>
             <a:r>
               <a:rPr lang="en-US" sz="2400" dirty="0"/>
-              <a:t>Because Python alone doesn’t enforce types at runtime.</a:t>
+              <a:t>Because Python alone doesn’t enforce types at runtime because Python is Dynamically Typed.</a:t>
             </a:r>
             <a:br>
               <a:rPr lang="en-US" sz="2400" dirty="0"/>
             </a:br>
+            <a:endParaRPr lang="en-US" sz="2400" dirty="0"/>
+          </a:p>
+          <a:p>
             <a:r>
               <a:rPr lang="en-US" sz="2400" dirty="0"/>
               <a:t>For example:</a:t>
@@ -20967,7 +20930,7 @@
         </p:blipFill>
         <p:spPr>
           <a:xfrm>
-            <a:off x="777240" y="2301688"/>
+            <a:off x="853440" y="3132339"/>
             <a:ext cx="10820400" cy="667749"/>
           </a:xfrm>
           <a:prstGeom prst="rect">
@@ -22212,7 +22175,7 @@
         <p:cNvPr id="1" name="">
           <a:extLst>
             <a:ext uri="{FF2B5EF4-FFF2-40B4-BE49-F238E27FC236}">
-              <a16:creationId xmlns:a16="http://schemas.microsoft.com/office/drawing/2014/main" id="{E2609368-7CE7-C125-C032-8487697C43CD}"/>
+              <a16:creationId xmlns:a16="http://schemas.microsoft.com/office/drawing/2014/main" id="{AE76F0C9-0F14-9401-9CDE-6C8355A40673}"/>
             </a:ext>
           </a:extLst>
         </p:cNvPr>
@@ -22232,7 +22195,7 @@
           <p:cNvPr id="3" name="Content Placeholder 2">
             <a:extLst>
               <a:ext uri="{FF2B5EF4-FFF2-40B4-BE49-F238E27FC236}">
-                <a16:creationId xmlns:a16="http://schemas.microsoft.com/office/drawing/2014/main" id="{F2E96A2F-4FDC-4354-21FF-A05E62E29338}"/>
+                <a16:creationId xmlns:a16="http://schemas.microsoft.com/office/drawing/2014/main" id="{DB144146-02E9-F2E9-8E92-7F25EF4CC958}"/>
               </a:ext>
             </a:extLst>
           </p:cNvPr>
@@ -22245,8 +22208,8 @@
         </p:nvSpPr>
         <p:spPr>
           <a:xfrm>
-            <a:off x="777240" y="574158"/>
-            <a:ext cx="10659110" cy="5784112"/>
+            <a:off x="777240" y="696686"/>
+            <a:ext cx="10659110" cy="5480277"/>
           </a:xfrm>
         </p:spPr>
         <p:txBody>
@@ -22255,691 +22218,17 @@
           </a:bodyPr>
           <a:lstStyle/>
           <a:p>
-            <a:pPr marL="0" indent="0" fontAlgn="ctr">
+            <a:pPr marL="0" indent="0">
               <a:buNone/>
             </a:pPr>
-            <a:endParaRPr lang="en-IN" sz="2800" dirty="0"/>
+            <a:endParaRPr lang="en-IN" sz="2400" dirty="0"/>
           </a:p>
         </p:txBody>
       </p:sp>
     </p:spTree>
     <p:extLst>
       <p:ext uri="{BB962C8B-B14F-4D97-AF65-F5344CB8AC3E}">
-        <p14:creationId xmlns:p14="http://schemas.microsoft.com/office/powerpoint/2010/main" val="1438792373"/>
-      </p:ext>
-    </p:extLst>
-  </p:cSld>
-  <p:clrMapOvr>
-    <a:masterClrMapping/>
-  </p:clrMapOvr>
-</p:sld>
-</file>
-
-<file path=ppt/slides/slide46.xml><?xml version="1.0" encoding="utf-8"?>
-<p:sld xmlns:a="http://schemas.openxmlformats.org/drawingml/2006/main" xmlns:r="http://schemas.openxmlformats.org/officeDocument/2006/relationships" xmlns:p="http://schemas.openxmlformats.org/presentationml/2006/main">
-  <p:cSld>
-    <p:spTree>
-      <p:nvGrpSpPr>
-        <p:cNvPr id="1" name="">
-          <a:extLst>
-            <a:ext uri="{FF2B5EF4-FFF2-40B4-BE49-F238E27FC236}">
-              <a16:creationId xmlns:a16="http://schemas.microsoft.com/office/drawing/2014/main" id="{250C6A9A-5906-66C0-3E3E-637829EC100C}"/>
-            </a:ext>
-          </a:extLst>
-        </p:cNvPr>
-        <p:cNvGrpSpPr/>
-        <p:nvPr/>
-      </p:nvGrpSpPr>
-      <p:grpSpPr>
-        <a:xfrm>
-          <a:off x="0" y="0"/>
-          <a:ext cx="0" cy="0"/>
-          <a:chOff x="0" y="0"/>
-          <a:chExt cx="0" cy="0"/>
-        </a:xfrm>
-      </p:grpSpPr>
-      <p:sp>
-        <p:nvSpPr>
-          <p:cNvPr id="3" name="Content Placeholder 2">
-            <a:extLst>
-              <a:ext uri="{FF2B5EF4-FFF2-40B4-BE49-F238E27FC236}">
-                <a16:creationId xmlns:a16="http://schemas.microsoft.com/office/drawing/2014/main" id="{20281E45-DEC9-B465-E2AD-F0A2FAC1965F}"/>
-              </a:ext>
-            </a:extLst>
-          </p:cNvPr>
-          <p:cNvSpPr>
-            <a:spLocks noGrp="1"/>
-          </p:cNvSpPr>
-          <p:nvPr>
-            <p:ph idx="1"/>
-          </p:nvPr>
-        </p:nvSpPr>
-        <p:spPr>
-          <a:xfrm>
-            <a:off x="777240" y="574158"/>
-            <a:ext cx="10659110" cy="5784112"/>
-          </a:xfrm>
-        </p:spPr>
-        <p:txBody>
-          <a:bodyPr>
-            <a:normAutofit/>
-          </a:bodyPr>
-          <a:lstStyle/>
-          <a:p>
-            <a:pPr marL="0" indent="0" fontAlgn="ctr">
-              <a:buNone/>
-            </a:pPr>
-            <a:endParaRPr lang="en-IN" sz="2800" dirty="0"/>
-          </a:p>
-        </p:txBody>
-      </p:sp>
-    </p:spTree>
-    <p:extLst>
-      <p:ext uri="{BB962C8B-B14F-4D97-AF65-F5344CB8AC3E}">
-        <p14:creationId xmlns:p14="http://schemas.microsoft.com/office/powerpoint/2010/main" val="34796182"/>
-      </p:ext>
-    </p:extLst>
-  </p:cSld>
-  <p:clrMapOvr>
-    <a:masterClrMapping/>
-  </p:clrMapOvr>
-</p:sld>
-</file>
-
-<file path=ppt/slides/slide47.xml><?xml version="1.0" encoding="utf-8"?>
-<p:sld xmlns:a="http://schemas.openxmlformats.org/drawingml/2006/main" xmlns:r="http://schemas.openxmlformats.org/officeDocument/2006/relationships" xmlns:p="http://schemas.openxmlformats.org/presentationml/2006/main">
-  <p:cSld>
-    <p:spTree>
-      <p:nvGrpSpPr>
-        <p:cNvPr id="1" name="">
-          <a:extLst>
-            <a:ext uri="{FF2B5EF4-FFF2-40B4-BE49-F238E27FC236}">
-              <a16:creationId xmlns:a16="http://schemas.microsoft.com/office/drawing/2014/main" id="{F8BF3F14-5A49-356B-937B-BBF0AFC81F3A}"/>
-            </a:ext>
-          </a:extLst>
-        </p:cNvPr>
-        <p:cNvGrpSpPr/>
-        <p:nvPr/>
-      </p:nvGrpSpPr>
-      <p:grpSpPr>
-        <a:xfrm>
-          <a:off x="0" y="0"/>
-          <a:ext cx="0" cy="0"/>
-          <a:chOff x="0" y="0"/>
-          <a:chExt cx="0" cy="0"/>
-        </a:xfrm>
-      </p:grpSpPr>
-      <p:sp>
-        <p:nvSpPr>
-          <p:cNvPr id="3" name="Content Placeholder 2">
-            <a:extLst>
-              <a:ext uri="{FF2B5EF4-FFF2-40B4-BE49-F238E27FC236}">
-                <a16:creationId xmlns:a16="http://schemas.microsoft.com/office/drawing/2014/main" id="{9A12F329-AA89-0AAC-D802-55444F31BAC2}"/>
-              </a:ext>
-            </a:extLst>
-          </p:cNvPr>
-          <p:cNvSpPr>
-            <a:spLocks noGrp="1"/>
-          </p:cNvSpPr>
-          <p:nvPr>
-            <p:ph idx="1"/>
-          </p:nvPr>
-        </p:nvSpPr>
-        <p:spPr>
-          <a:xfrm>
-            <a:off x="777240" y="574158"/>
-            <a:ext cx="10659110" cy="5784112"/>
-          </a:xfrm>
-        </p:spPr>
-        <p:txBody>
-          <a:bodyPr>
-            <a:normAutofit/>
-          </a:bodyPr>
-          <a:lstStyle/>
-          <a:p>
-            <a:pPr marL="0" indent="0" fontAlgn="ctr">
-              <a:buNone/>
-            </a:pPr>
-            <a:endParaRPr lang="en-IN" sz="2800" dirty="0"/>
-          </a:p>
-        </p:txBody>
-      </p:sp>
-    </p:spTree>
-    <p:extLst>
-      <p:ext uri="{BB962C8B-B14F-4D97-AF65-F5344CB8AC3E}">
-        <p14:creationId xmlns:p14="http://schemas.microsoft.com/office/powerpoint/2010/main" val="2734079874"/>
-      </p:ext>
-    </p:extLst>
-  </p:cSld>
-  <p:clrMapOvr>
-    <a:masterClrMapping/>
-  </p:clrMapOvr>
-</p:sld>
-</file>
-
-<file path=ppt/slides/slide48.xml><?xml version="1.0" encoding="utf-8"?>
-<p:sld xmlns:a="http://schemas.openxmlformats.org/drawingml/2006/main" xmlns:r="http://schemas.openxmlformats.org/officeDocument/2006/relationships" xmlns:p="http://schemas.openxmlformats.org/presentationml/2006/main">
-  <p:cSld>
-    <p:spTree>
-      <p:nvGrpSpPr>
-        <p:cNvPr id="1" name="">
-          <a:extLst>
-            <a:ext uri="{FF2B5EF4-FFF2-40B4-BE49-F238E27FC236}">
-              <a16:creationId xmlns:a16="http://schemas.microsoft.com/office/drawing/2014/main" id="{30A4FD42-C5AA-188E-045F-B73CB14439A9}"/>
-            </a:ext>
-          </a:extLst>
-        </p:cNvPr>
-        <p:cNvGrpSpPr/>
-        <p:nvPr/>
-      </p:nvGrpSpPr>
-      <p:grpSpPr>
-        <a:xfrm>
-          <a:off x="0" y="0"/>
-          <a:ext cx="0" cy="0"/>
-          <a:chOff x="0" y="0"/>
-          <a:chExt cx="0" cy="0"/>
-        </a:xfrm>
-      </p:grpSpPr>
-      <p:sp>
-        <p:nvSpPr>
-          <p:cNvPr id="3" name="Content Placeholder 2">
-            <a:extLst>
-              <a:ext uri="{FF2B5EF4-FFF2-40B4-BE49-F238E27FC236}">
-                <a16:creationId xmlns:a16="http://schemas.microsoft.com/office/drawing/2014/main" id="{6A33E1D5-CA5D-7393-4CE8-623A831841B0}"/>
-              </a:ext>
-            </a:extLst>
-          </p:cNvPr>
-          <p:cNvSpPr>
-            <a:spLocks noGrp="1"/>
-          </p:cNvSpPr>
-          <p:nvPr>
-            <p:ph idx="1"/>
-          </p:nvPr>
-        </p:nvSpPr>
-        <p:spPr>
-          <a:xfrm>
-            <a:off x="777240" y="968828"/>
-            <a:ext cx="11120846" cy="4147457"/>
-          </a:xfrm>
-        </p:spPr>
-        <p:txBody>
-          <a:bodyPr>
-            <a:normAutofit/>
-          </a:bodyPr>
-          <a:lstStyle/>
-          <a:p>
-            <a:pPr marL="0" indent="0">
-              <a:buNone/>
-            </a:pPr>
-            <a:r>
-              <a:rPr lang="en-US" sz="2800" b="1" dirty="0"/>
-              <a:t>Types of Modules in </a:t>
-            </a:r>
-            <a:r>
-              <a:rPr lang="en-US" sz="2800" b="1" dirty="0" err="1"/>
-              <a:t>FastAPI</a:t>
-            </a:r>
-            <a:r>
-              <a:rPr lang="en-US" sz="2800" b="1" dirty="0"/>
-              <a:t>:</a:t>
-            </a:r>
-          </a:p>
-          <a:p>
-            <a:pPr marL="0" indent="0">
-              <a:buNone/>
-            </a:pPr>
-            <a:r>
-              <a:rPr lang="en-US" sz="2400" b="1" dirty="0"/>
-              <a:t>1. Core Modules (Built-In): </a:t>
-            </a:r>
-            <a:r>
-              <a:rPr lang="en-US" sz="2400" dirty="0"/>
-              <a:t>These are modules that are </a:t>
-            </a:r>
-            <a:r>
-              <a:rPr lang="en-US" sz="2400" b="1" dirty="0">
-                <a:solidFill>
-                  <a:srgbClr val="C00000"/>
-                </a:solidFill>
-              </a:rPr>
-              <a:t>included with Python </a:t>
-            </a:r>
-            <a:r>
-              <a:rPr lang="en-US" sz="2400" dirty="0"/>
-              <a:t>and provide basic functionality. </a:t>
-            </a:r>
-            <a:r>
-              <a:rPr lang="en-US" sz="2400" b="1" dirty="0"/>
-              <a:t>Examples</a:t>
-            </a:r>
-            <a:r>
-              <a:rPr lang="en-US" sz="2400" dirty="0"/>
-              <a:t> </a:t>
-            </a:r>
-            <a:r>
-              <a:rPr lang="en-US" sz="2400" dirty="0" err="1"/>
-              <a:t>os</a:t>
-            </a:r>
-            <a:r>
-              <a:rPr lang="en-US" sz="2400" dirty="0"/>
-              <a:t>, math, datetime, </a:t>
-            </a:r>
-            <a:r>
-              <a:rPr lang="en-US" sz="2400" dirty="0" err="1"/>
-              <a:t>json</a:t>
-            </a:r>
-            <a:r>
-              <a:rPr lang="en-US" sz="2400" dirty="0"/>
-              <a:t>, random.</a:t>
-            </a:r>
-          </a:p>
-          <a:p>
-            <a:pPr marL="0" indent="0">
-              <a:buNone/>
-            </a:pPr>
-            <a:r>
-              <a:rPr lang="en-US" sz="2400" b="1" dirty="0"/>
-              <a:t>2. Local Modules: </a:t>
-            </a:r>
-            <a:r>
-              <a:rPr lang="en-US" sz="2400" dirty="0"/>
-              <a:t>These are modules that </a:t>
-            </a:r>
-            <a:r>
-              <a:rPr lang="en-US" sz="2400" b="1" dirty="0">
-                <a:solidFill>
-                  <a:srgbClr val="C00000"/>
-                </a:solidFill>
-              </a:rPr>
-              <a:t>you create </a:t>
-            </a:r>
-            <a:r>
-              <a:rPr lang="en-US" sz="2400" dirty="0"/>
-              <a:t>in your Python application. You can create a local module by defining a Python file.</a:t>
-            </a:r>
-          </a:p>
-          <a:p>
-            <a:pPr marL="0" indent="0">
-              <a:buNone/>
-            </a:pPr>
-            <a:r>
-              <a:rPr lang="en-US" sz="2400" b="1" dirty="0"/>
-              <a:t>3. Third-party Modules: </a:t>
-            </a:r>
-            <a:r>
-              <a:rPr lang="en-US" sz="2400" dirty="0"/>
-              <a:t>These are modules created by </a:t>
-            </a:r>
-            <a:r>
-              <a:rPr lang="en-US" sz="2400" b="1" dirty="0">
-                <a:solidFill>
-                  <a:srgbClr val="C00000"/>
-                </a:solidFill>
-              </a:rPr>
-              <a:t>third-party developers </a:t>
-            </a:r>
-            <a:r>
-              <a:rPr lang="en-US" sz="2400" dirty="0"/>
-              <a:t>and are </a:t>
-            </a:r>
-            <a:r>
-              <a:rPr lang="en-US" sz="2400" b="1" dirty="0">
-                <a:solidFill>
-                  <a:srgbClr val="C00000"/>
-                </a:solidFill>
-              </a:rPr>
-              <a:t>not included with Python</a:t>
-            </a:r>
-            <a:r>
-              <a:rPr lang="en-US" sz="2400" dirty="0"/>
-              <a:t>. You can install third-party modules using </a:t>
-            </a:r>
-            <a:r>
-              <a:rPr lang="en-US" sz="2400" b="1" dirty="0">
-                <a:solidFill>
-                  <a:srgbClr val="C00000"/>
-                </a:solidFill>
-              </a:rPr>
-              <a:t>pip</a:t>
-            </a:r>
-            <a:r>
-              <a:rPr lang="en-US" sz="2400" dirty="0"/>
-              <a:t> (Node Package Manager) and then use </a:t>
-            </a:r>
-            <a:r>
-              <a:rPr lang="en-US" sz="2400" b="1" dirty="0">
-                <a:solidFill>
-                  <a:srgbClr val="C00000"/>
-                </a:solidFill>
-              </a:rPr>
-              <a:t>import </a:t>
-            </a:r>
-            <a:r>
-              <a:rPr lang="en-US" sz="2400" dirty="0"/>
-              <a:t>to include them in your application.</a:t>
-            </a:r>
-            <a:endParaRPr lang="en-IN" sz="2400" dirty="0"/>
-          </a:p>
-        </p:txBody>
-      </p:sp>
-    </p:spTree>
-    <p:extLst>
-      <p:ext uri="{BB962C8B-B14F-4D97-AF65-F5344CB8AC3E}">
-        <p14:creationId xmlns:p14="http://schemas.microsoft.com/office/powerpoint/2010/main" val="3332929625"/>
-      </p:ext>
-    </p:extLst>
-  </p:cSld>
-  <p:clrMapOvr>
-    <a:masterClrMapping/>
-  </p:clrMapOvr>
-</p:sld>
-</file>
-
-<file path=ppt/slides/slide49.xml><?xml version="1.0" encoding="utf-8"?>
-<p:sld xmlns:a="http://schemas.openxmlformats.org/drawingml/2006/main" xmlns:r="http://schemas.openxmlformats.org/officeDocument/2006/relationships" xmlns:p="http://schemas.openxmlformats.org/presentationml/2006/main">
-  <p:cSld>
-    <p:spTree>
-      <p:nvGrpSpPr>
-        <p:cNvPr id="1" name="">
-          <a:extLst>
-            <a:ext uri="{FF2B5EF4-FFF2-40B4-BE49-F238E27FC236}">
-              <a16:creationId xmlns:a16="http://schemas.microsoft.com/office/drawing/2014/main" id="{F90520F2-CA84-17AF-6B6B-587BC8BCEB12}"/>
-            </a:ext>
-          </a:extLst>
-        </p:cNvPr>
-        <p:cNvGrpSpPr/>
-        <p:nvPr/>
-      </p:nvGrpSpPr>
-      <p:grpSpPr>
-        <a:xfrm>
-          <a:off x="0" y="0"/>
-          <a:ext cx="0" cy="0"/>
-          <a:chOff x="0" y="0"/>
-          <a:chExt cx="0" cy="0"/>
-        </a:xfrm>
-      </p:grpSpPr>
-      <p:sp>
-        <p:nvSpPr>
-          <p:cNvPr id="3" name="Content Placeholder 2">
-            <a:extLst>
-              <a:ext uri="{FF2B5EF4-FFF2-40B4-BE49-F238E27FC236}">
-                <a16:creationId xmlns:a16="http://schemas.microsoft.com/office/drawing/2014/main" id="{B3E740B7-3016-3ABF-8912-284FC640E81B}"/>
-              </a:ext>
-            </a:extLst>
-          </p:cNvPr>
-          <p:cNvSpPr>
-            <a:spLocks noGrp="1"/>
-          </p:cNvSpPr>
-          <p:nvPr>
-            <p:ph idx="1"/>
-          </p:nvPr>
-        </p:nvSpPr>
-        <p:spPr>
-          <a:xfrm>
-            <a:off x="777240" y="674914"/>
-            <a:ext cx="10659110" cy="5627915"/>
-          </a:xfrm>
-        </p:spPr>
-        <p:txBody>
-          <a:bodyPr>
-            <a:normAutofit/>
-          </a:bodyPr>
-          <a:lstStyle/>
-          <a:p>
-            <a:pPr marL="0" indent="0">
-              <a:buNone/>
-            </a:pPr>
-            <a:r>
-              <a:rPr lang="en-US" sz="2800" b="1" dirty="0"/>
-              <a:t>Core Modules</a:t>
-            </a:r>
-            <a:r>
-              <a:rPr lang="en-US" sz="2800" dirty="0"/>
-              <a:t> :</a:t>
-            </a:r>
-          </a:p>
-          <a:p>
-            <a:pPr marL="0" indent="0">
-              <a:buNone/>
-            </a:pPr>
-            <a:r>
-              <a:rPr lang="en-US" sz="2400" dirty="0"/>
-              <a:t>In Python, </a:t>
-            </a:r>
-            <a:r>
-              <a:rPr lang="en-US" sz="2400" b="1" dirty="0"/>
-              <a:t>Core Modules</a:t>
-            </a:r>
-            <a:r>
-              <a:rPr lang="en-US" sz="2400" dirty="0"/>
-              <a:t> are the </a:t>
-            </a:r>
-            <a:r>
-              <a:rPr lang="en-US" sz="2400" b="1" dirty="0">
-                <a:solidFill>
-                  <a:srgbClr val="C00000"/>
-                </a:solidFill>
-              </a:rPr>
-              <a:t>built-in modules </a:t>
-            </a:r>
-            <a:r>
-              <a:rPr lang="en-US" sz="2400" dirty="0"/>
-              <a:t>that come </a:t>
-            </a:r>
-            <a:r>
-              <a:rPr lang="en-US" sz="2400" b="1" dirty="0">
-                <a:solidFill>
-                  <a:srgbClr val="C00000"/>
-                </a:solidFill>
-              </a:rPr>
-              <a:t>pre-installed with </a:t>
-            </a:r>
-            <a:r>
-              <a:rPr lang="en-US" sz="2400" dirty="0"/>
-              <a:t>Python. These modules provide </a:t>
-            </a:r>
-            <a:r>
-              <a:rPr lang="en-US" sz="2400" b="1" dirty="0"/>
-              <a:t>essential functionalities </a:t>
-            </a:r>
-            <a:r>
-              <a:rPr lang="en-US" sz="2400" dirty="0"/>
-              <a:t>for building applications and </a:t>
-            </a:r>
-            <a:r>
-              <a:rPr lang="en-US" sz="2400" b="1" dirty="0">
-                <a:solidFill>
-                  <a:srgbClr val="002060"/>
-                </a:solidFill>
-              </a:rPr>
-              <a:t>eliminate</a:t>
-            </a:r>
-            <a:r>
-              <a:rPr lang="en-US" sz="2400" b="1" dirty="0"/>
-              <a:t> the need for </a:t>
-            </a:r>
-            <a:r>
-              <a:rPr lang="en-US" sz="2400" b="1" dirty="0">
-                <a:solidFill>
-                  <a:srgbClr val="002060"/>
-                </a:solidFill>
-              </a:rPr>
-              <a:t>additional installation</a:t>
-            </a:r>
-            <a:r>
-              <a:rPr lang="en-US" sz="2400" dirty="0"/>
-              <a:t>. They are designed to perform various tasks such as </a:t>
-            </a:r>
-            <a:r>
-              <a:rPr lang="en-US" sz="2400" b="1" dirty="0"/>
-              <a:t>file handling</a:t>
-            </a:r>
-            <a:r>
-              <a:rPr lang="en-US" sz="2400" dirty="0"/>
-              <a:t>, </a:t>
-            </a:r>
-            <a:r>
-              <a:rPr lang="en-US" sz="2400" b="1" dirty="0"/>
-              <a:t>HTTP</a:t>
-            </a:r>
-            <a:r>
-              <a:rPr lang="en-US" sz="2400" dirty="0"/>
-              <a:t> </a:t>
-            </a:r>
-            <a:r>
-              <a:rPr lang="en-US" sz="2400" b="1" dirty="0"/>
-              <a:t>operations</a:t>
-            </a:r>
-            <a:r>
-              <a:rPr lang="en-US" sz="2400" dirty="0"/>
-              <a:t>, </a:t>
-            </a:r>
-            <a:r>
-              <a:rPr lang="en-US" sz="2400" b="1" dirty="0"/>
-              <a:t>cryptography</a:t>
-            </a:r>
-            <a:r>
-              <a:rPr lang="en-US" sz="2400" dirty="0"/>
-              <a:t>, </a:t>
-            </a:r>
-            <a:r>
-              <a:rPr lang="en-US" sz="2400" b="1" dirty="0"/>
-              <a:t>stream</a:t>
-            </a:r>
-            <a:r>
-              <a:rPr lang="en-US" sz="2400" dirty="0"/>
-              <a:t> </a:t>
-            </a:r>
-            <a:r>
-              <a:rPr lang="en-US" sz="2400" b="1" dirty="0"/>
-              <a:t>handling</a:t>
-            </a:r>
-            <a:r>
-              <a:rPr lang="en-US" sz="2400" dirty="0"/>
-              <a:t>, and more.</a:t>
-            </a:r>
-            <a:endParaRPr lang="en-US" sz="2400" b="1" dirty="0"/>
-          </a:p>
-          <a:p>
-            <a:pPr marL="0" indent="0">
-              <a:buNone/>
-            </a:pPr>
-            <a:r>
-              <a:rPr lang="en-US" sz="2400" b="1" dirty="0"/>
-              <a:t>Key Features of Core Modules</a:t>
-            </a:r>
-          </a:p>
-          <a:p>
-            <a:pPr>
-              <a:buFont typeface="+mj-lt"/>
-              <a:buAutoNum type="arabicPeriod"/>
-            </a:pPr>
-            <a:r>
-              <a:rPr lang="en-US" sz="2400" b="1" dirty="0"/>
-              <a:t> No Installation Needed</a:t>
-            </a:r>
-            <a:r>
-              <a:rPr lang="en-US" sz="2400" dirty="0"/>
-              <a:t>: Core modules are </a:t>
-            </a:r>
-            <a:r>
-              <a:rPr lang="en-US" sz="2400" b="1" dirty="0">
-                <a:solidFill>
-                  <a:srgbClr val="002060"/>
-                </a:solidFill>
-              </a:rPr>
-              <a:t>part of the </a:t>
-            </a:r>
-            <a:r>
-              <a:rPr lang="en-US" sz="2400" dirty="0"/>
-              <a:t>Python</a:t>
-            </a:r>
-            <a:r>
-              <a:rPr lang="en-US" sz="2400" b="1" dirty="0">
-                <a:solidFill>
-                  <a:srgbClr val="002060"/>
-                </a:solidFill>
-              </a:rPr>
-              <a:t> </a:t>
-            </a:r>
-            <a:r>
-              <a:rPr lang="en-US" sz="2400" b="1" dirty="0">
-                <a:solidFill>
-                  <a:srgbClr val="C00000"/>
-                </a:solidFill>
-              </a:rPr>
-              <a:t>runtime</a:t>
-            </a:r>
-            <a:r>
-              <a:rPr lang="en-US" sz="2400" b="1" dirty="0">
-                <a:solidFill>
-                  <a:srgbClr val="002060"/>
-                </a:solidFill>
-              </a:rPr>
-              <a:t> </a:t>
-            </a:r>
-            <a:r>
-              <a:rPr lang="en-US" sz="2400" dirty="0"/>
-              <a:t>and can be used directly without installing any additional packages.</a:t>
-            </a:r>
-          </a:p>
-          <a:p>
-            <a:pPr>
-              <a:buFont typeface="+mj-lt"/>
-              <a:buAutoNum type="arabicPeriod"/>
-            </a:pPr>
-            <a:r>
-              <a:rPr lang="en-US" sz="2400" b="1" dirty="0"/>
-              <a:t> Global Availability</a:t>
-            </a:r>
-            <a:r>
-              <a:rPr lang="en-US" sz="2400" dirty="0"/>
-              <a:t>: Core modules can be imported and used in any Node.js application.</a:t>
-            </a:r>
-          </a:p>
-          <a:p>
-            <a:pPr>
-              <a:buFont typeface="+mj-lt"/>
-              <a:buAutoNum type="arabicPeriod"/>
-            </a:pPr>
-            <a:r>
-              <a:rPr lang="en-US" sz="2400" b="1" dirty="0"/>
-              <a:t> Common Core Modules: </a:t>
-            </a:r>
-            <a:r>
-              <a:rPr lang="en-US" sz="2400" dirty="0" err="1"/>
-              <a:t>os</a:t>
-            </a:r>
-            <a:r>
-              <a:rPr lang="en-US" sz="2400" dirty="0"/>
-              <a:t>, math, datetime, </a:t>
-            </a:r>
-            <a:r>
-              <a:rPr lang="en-US" sz="2400" dirty="0" err="1"/>
-              <a:t>json</a:t>
-            </a:r>
-            <a:r>
-              <a:rPr lang="en-US" sz="2400" dirty="0"/>
-              <a:t>, random &amp; </a:t>
-            </a:r>
-            <a:r>
-              <a:rPr lang="en-US" sz="2400" dirty="0" err="1"/>
-              <a:t>etc</a:t>
-            </a:r>
-            <a:endParaRPr lang="en-US" sz="2400" dirty="0"/>
-          </a:p>
-          <a:p>
-            <a:pPr marL="0" indent="0">
-              <a:buNone/>
-            </a:pPr>
-            <a:endParaRPr lang="en-IN" sz="2400" dirty="0"/>
-          </a:p>
-        </p:txBody>
-      </p:sp>
-    </p:spTree>
-    <p:extLst>
-      <p:ext uri="{BB962C8B-B14F-4D97-AF65-F5344CB8AC3E}">
-        <p14:creationId xmlns:p14="http://schemas.microsoft.com/office/powerpoint/2010/main" val="2300769400"/>
+        <p14:creationId xmlns:p14="http://schemas.microsoft.com/office/powerpoint/2010/main" val="2647842385"/>
       </p:ext>
     </p:extLst>
   </p:cSld>
@@ -23296,1730 +22585,6 @@
 </p:sld>
 </file>
 
-<file path=ppt/slides/slide50.xml><?xml version="1.0" encoding="utf-8"?>
-<p:sld xmlns:a="http://schemas.openxmlformats.org/drawingml/2006/main" xmlns:r="http://schemas.openxmlformats.org/officeDocument/2006/relationships" xmlns:p="http://schemas.openxmlformats.org/presentationml/2006/main">
-  <p:cSld>
-    <p:spTree>
-      <p:nvGrpSpPr>
-        <p:cNvPr id="1" name="">
-          <a:extLst>
-            <a:ext uri="{FF2B5EF4-FFF2-40B4-BE49-F238E27FC236}">
-              <a16:creationId xmlns:a16="http://schemas.microsoft.com/office/drawing/2014/main" id="{53EC6DE7-7FC9-1236-DA94-8D4B4BE08AC6}"/>
-            </a:ext>
-          </a:extLst>
-        </p:cNvPr>
-        <p:cNvGrpSpPr/>
-        <p:nvPr/>
-      </p:nvGrpSpPr>
-      <p:grpSpPr>
-        <a:xfrm>
-          <a:off x="0" y="0"/>
-          <a:ext cx="0" cy="0"/>
-          <a:chOff x="0" y="0"/>
-          <a:chExt cx="0" cy="0"/>
-        </a:xfrm>
-      </p:grpSpPr>
-      <p:sp>
-        <p:nvSpPr>
-          <p:cNvPr id="3" name="Content Placeholder 2">
-            <a:extLst>
-              <a:ext uri="{FF2B5EF4-FFF2-40B4-BE49-F238E27FC236}">
-                <a16:creationId xmlns:a16="http://schemas.microsoft.com/office/drawing/2014/main" id="{0A2E6B69-87AA-BAD3-6374-33CF86703D7D}"/>
-              </a:ext>
-            </a:extLst>
-          </p:cNvPr>
-          <p:cNvSpPr>
-            <a:spLocks noGrp="1"/>
-          </p:cNvSpPr>
-          <p:nvPr>
-            <p:ph idx="1"/>
-          </p:nvPr>
-        </p:nvSpPr>
-        <p:spPr>
-          <a:xfrm>
-            <a:off x="777240" y="674914"/>
-            <a:ext cx="10659110" cy="5502049"/>
-          </a:xfrm>
-        </p:spPr>
-        <p:txBody>
-          <a:bodyPr>
-            <a:normAutofit/>
-          </a:bodyPr>
-          <a:lstStyle/>
-          <a:p>
-            <a:pPr marL="0" indent="0">
-              <a:buNone/>
-            </a:pPr>
-            <a:r>
-              <a:rPr lang="en-US" sz="2400" b="1" dirty="0"/>
-              <a:t>Using Core Modules:</a:t>
-            </a:r>
-          </a:p>
-          <a:p>
-            <a:pPr marL="0" indent="0">
-              <a:buNone/>
-            </a:pPr>
-            <a:r>
-              <a:rPr lang="en-US" sz="2400" dirty="0"/>
-              <a:t>To use a core module Python, you import it using the </a:t>
-            </a:r>
-            <a:r>
-              <a:rPr lang="en-US" sz="2400" b="1" dirty="0"/>
-              <a:t>import </a:t>
-            </a:r>
-            <a:r>
-              <a:rPr lang="en-US" sz="2400" dirty="0"/>
-              <a:t>Keyword:</a:t>
-            </a:r>
-          </a:p>
-          <a:p>
-            <a:pPr marL="0" indent="0">
-              <a:buNone/>
-            </a:pPr>
-            <a:endParaRPr lang="en-US" sz="2400" dirty="0"/>
-          </a:p>
-          <a:p>
-            <a:pPr marL="0" indent="0">
-              <a:buNone/>
-            </a:pPr>
-            <a:endParaRPr lang="en-US" sz="2400" dirty="0"/>
-          </a:p>
-          <a:p>
-            <a:pPr marL="0" indent="0">
-              <a:buNone/>
-            </a:pPr>
-            <a:endParaRPr lang="en-US" sz="2400" dirty="0"/>
-          </a:p>
-          <a:p>
-            <a:pPr marL="0" indent="0">
-              <a:buNone/>
-            </a:pPr>
-            <a:endParaRPr lang="en-US" sz="2400" dirty="0"/>
-          </a:p>
-          <a:p>
-            <a:pPr marL="0" indent="0">
-              <a:buNone/>
-            </a:pPr>
-            <a:endParaRPr lang="en-IN" sz="2400" dirty="0"/>
-          </a:p>
-        </p:txBody>
-      </p:sp>
-      <p:pic>
-        <p:nvPicPr>
-          <p:cNvPr id="6" name="Picture 5">
-            <a:extLst>
-              <a:ext uri="{FF2B5EF4-FFF2-40B4-BE49-F238E27FC236}">
-                <a16:creationId xmlns:a16="http://schemas.microsoft.com/office/drawing/2014/main" id="{E167A523-6135-BAA6-3635-3A881B9CED8E}"/>
-              </a:ext>
-            </a:extLst>
-          </p:cNvPr>
-          <p:cNvPicPr>
-            <a:picLocks noChangeAspect="1"/>
-          </p:cNvPicPr>
-          <p:nvPr/>
-        </p:nvPicPr>
-        <p:blipFill>
-          <a:blip r:embed="rId2"/>
-          <a:stretch>
-            <a:fillRect/>
-          </a:stretch>
-        </p:blipFill>
-        <p:spPr>
-          <a:xfrm>
-            <a:off x="1216467" y="1874029"/>
-            <a:ext cx="8645990" cy="4203660"/>
-          </a:xfrm>
-          <a:prstGeom prst="rect">
-            <a:avLst/>
-          </a:prstGeom>
-        </p:spPr>
-      </p:pic>
-    </p:spTree>
-    <p:extLst>
-      <p:ext uri="{BB962C8B-B14F-4D97-AF65-F5344CB8AC3E}">
-        <p14:creationId xmlns:p14="http://schemas.microsoft.com/office/powerpoint/2010/main" val="1739931258"/>
-      </p:ext>
-    </p:extLst>
-  </p:cSld>
-  <p:clrMapOvr>
-    <a:masterClrMapping/>
-  </p:clrMapOvr>
-</p:sld>
-</file>
-
-<file path=ppt/slides/slide51.xml><?xml version="1.0" encoding="utf-8"?>
-<p:sld xmlns:a="http://schemas.openxmlformats.org/drawingml/2006/main" xmlns:r="http://schemas.openxmlformats.org/officeDocument/2006/relationships" xmlns:p="http://schemas.openxmlformats.org/presentationml/2006/main">
-  <p:cSld>
-    <p:spTree>
-      <p:nvGrpSpPr>
-        <p:cNvPr id="1" name="">
-          <a:extLst>
-            <a:ext uri="{FF2B5EF4-FFF2-40B4-BE49-F238E27FC236}">
-              <a16:creationId xmlns:a16="http://schemas.microsoft.com/office/drawing/2014/main" id="{63875F5F-2FC0-2CA4-C69F-AA5455F30B52}"/>
-            </a:ext>
-          </a:extLst>
-        </p:cNvPr>
-        <p:cNvGrpSpPr/>
-        <p:nvPr/>
-      </p:nvGrpSpPr>
-      <p:grpSpPr>
-        <a:xfrm>
-          <a:off x="0" y="0"/>
-          <a:ext cx="0" cy="0"/>
-          <a:chOff x="0" y="0"/>
-          <a:chExt cx="0" cy="0"/>
-        </a:xfrm>
-      </p:grpSpPr>
-      <p:sp>
-        <p:nvSpPr>
-          <p:cNvPr id="3" name="Content Placeholder 2">
-            <a:extLst>
-              <a:ext uri="{FF2B5EF4-FFF2-40B4-BE49-F238E27FC236}">
-                <a16:creationId xmlns:a16="http://schemas.microsoft.com/office/drawing/2014/main" id="{411785FC-CF7A-2BDA-F499-ADEA8A423685}"/>
-              </a:ext>
-            </a:extLst>
-          </p:cNvPr>
-          <p:cNvSpPr>
-            <a:spLocks noGrp="1"/>
-          </p:cNvSpPr>
-          <p:nvPr>
-            <p:ph idx="1"/>
-          </p:nvPr>
-        </p:nvSpPr>
-        <p:spPr>
-          <a:xfrm>
-            <a:off x="766445" y="1001485"/>
-            <a:ext cx="10659110" cy="4855029"/>
-          </a:xfrm>
-        </p:spPr>
-        <p:txBody>
-          <a:bodyPr>
-            <a:normAutofit/>
-          </a:bodyPr>
-          <a:lstStyle/>
-          <a:p>
-            <a:pPr marL="0" indent="0">
-              <a:buNone/>
-            </a:pPr>
-            <a:r>
-              <a:rPr lang="en-US" sz="2400" b="1" dirty="0"/>
-              <a:t>2. Local Modules:</a:t>
-            </a:r>
-          </a:p>
-          <a:p>
-            <a:pPr marL="0" indent="0">
-              <a:buNone/>
-            </a:pPr>
-            <a:r>
-              <a:rPr lang="en-US" sz="2400" dirty="0"/>
-              <a:t>Local Modules in </a:t>
-            </a:r>
-            <a:r>
-              <a:rPr lang="en-US" sz="2400" dirty="0" err="1"/>
-              <a:t>Pythonare</a:t>
-            </a:r>
-            <a:r>
-              <a:rPr lang="en-US" sz="2400" dirty="0"/>
-              <a:t> </a:t>
-            </a:r>
-            <a:r>
-              <a:rPr lang="en-US" sz="2400" b="1" dirty="0">
-                <a:solidFill>
-                  <a:srgbClr val="C00000"/>
-                </a:solidFill>
-              </a:rPr>
-              <a:t>custom modules </a:t>
-            </a:r>
-            <a:r>
-              <a:rPr lang="en-US" sz="2400" b="1" dirty="0"/>
-              <a:t>created by developers </a:t>
-            </a:r>
-            <a:r>
-              <a:rPr lang="en-US" sz="2400" dirty="0"/>
-              <a:t>to </a:t>
-            </a:r>
-            <a:r>
-              <a:rPr lang="en-US" sz="2400" b="1" dirty="0">
-                <a:solidFill>
-                  <a:srgbClr val="C00000"/>
-                </a:solidFill>
-              </a:rPr>
-              <a:t>encapsulate</a:t>
-            </a:r>
-            <a:r>
-              <a:rPr lang="en-US" sz="2400" dirty="0"/>
-              <a:t> </a:t>
-            </a:r>
-            <a:r>
-              <a:rPr lang="en-US" sz="2400" b="1" dirty="0"/>
-              <a:t>specific functionality </a:t>
-            </a:r>
-            <a:r>
-              <a:rPr lang="en-US" sz="2400" dirty="0"/>
-              <a:t>within their applications. Unlike </a:t>
-            </a:r>
-            <a:r>
-              <a:rPr lang="en-US" sz="2400" b="1" dirty="0"/>
-              <a:t>core modules </a:t>
-            </a:r>
-            <a:r>
-              <a:rPr lang="en-US" sz="2400" dirty="0"/>
-              <a:t>(built into Python) or </a:t>
-            </a:r>
-            <a:r>
-              <a:rPr lang="en-US" sz="2400" b="1" dirty="0"/>
-              <a:t>third-party modules </a:t>
-            </a:r>
-            <a:r>
-              <a:rPr lang="en-US" sz="2400" dirty="0"/>
-              <a:t>(installed via </a:t>
-            </a:r>
-            <a:r>
-              <a:rPr lang="en-US" sz="2400" b="1" dirty="0"/>
-              <a:t>pip</a:t>
-            </a:r>
-            <a:r>
-              <a:rPr lang="en-US" sz="2400" dirty="0"/>
-              <a:t>), </a:t>
-            </a:r>
-            <a:r>
-              <a:rPr lang="en-US" sz="2400" b="1" dirty="0"/>
-              <a:t>local modules are </a:t>
-            </a:r>
-            <a:r>
-              <a:rPr lang="en-US" sz="2400" b="1" dirty="0">
-                <a:solidFill>
-                  <a:srgbClr val="002060"/>
-                </a:solidFill>
-              </a:rPr>
-              <a:t>part of your project</a:t>
-            </a:r>
-            <a:r>
-              <a:rPr lang="en-US" sz="2400" dirty="0"/>
-              <a:t>, often created to organize and reuse code.</a:t>
-            </a:r>
-          </a:p>
-          <a:p>
-            <a:pPr marL="0" indent="0">
-              <a:buNone/>
-            </a:pPr>
-            <a:endParaRPr lang="en-US" sz="800" dirty="0"/>
-          </a:p>
-          <a:p>
-            <a:pPr marL="0" indent="0">
-              <a:buNone/>
-            </a:pPr>
-            <a:r>
-              <a:rPr lang="en-US" sz="2400" b="1" dirty="0"/>
-              <a:t>Characteristics of Local Modules:</a:t>
-            </a:r>
-          </a:p>
-          <a:p>
-            <a:r>
-              <a:rPr lang="en-US" sz="2400" b="1" dirty="0"/>
-              <a:t>Custom-built: </a:t>
-            </a:r>
-            <a:r>
-              <a:rPr lang="en-US" sz="2400" dirty="0"/>
-              <a:t>Designed to address specific requirements of the application.</a:t>
-            </a:r>
-          </a:p>
-          <a:p>
-            <a:r>
-              <a:rPr lang="en-US" sz="2400" b="1" dirty="0"/>
-              <a:t>Reusable: </a:t>
-            </a:r>
-            <a:r>
-              <a:rPr lang="en-US" sz="2400" dirty="0"/>
-              <a:t>Can be </a:t>
-            </a:r>
-            <a:r>
-              <a:rPr lang="en-US" sz="2400" b="1" dirty="0"/>
-              <a:t>imported</a:t>
-            </a:r>
-            <a:r>
-              <a:rPr lang="en-US" sz="2400" dirty="0"/>
-              <a:t> and </a:t>
-            </a:r>
-            <a:r>
-              <a:rPr lang="en-US" sz="2400" b="1" dirty="0"/>
-              <a:t>used</a:t>
-            </a:r>
-            <a:r>
-              <a:rPr lang="en-US" sz="2400" dirty="0"/>
-              <a:t> across </a:t>
-            </a:r>
-            <a:r>
-              <a:rPr lang="en-US" sz="2400" b="1" dirty="0"/>
-              <a:t>different parts of the project</a:t>
-            </a:r>
-            <a:r>
-              <a:rPr lang="en-US" sz="2400" dirty="0"/>
-              <a:t>.</a:t>
-            </a:r>
-          </a:p>
-          <a:p>
-            <a:r>
-              <a:rPr lang="en-US" sz="2400" b="1" dirty="0"/>
-              <a:t>File-based: </a:t>
-            </a:r>
-            <a:r>
-              <a:rPr lang="en-US" sz="2400" dirty="0"/>
-              <a:t>Each local module </a:t>
-            </a:r>
-            <a:r>
-              <a:rPr lang="en-US" sz="2400" b="1" dirty="0"/>
-              <a:t>corresponds to a Python file </a:t>
-            </a:r>
-            <a:r>
-              <a:rPr lang="en-US" sz="2400" dirty="0"/>
-              <a:t>or a </a:t>
-            </a:r>
-            <a:r>
-              <a:rPr lang="en-US" sz="2400" b="1" dirty="0"/>
-              <a:t>set of files </a:t>
-            </a:r>
-            <a:r>
-              <a:rPr lang="en-US" sz="2400" dirty="0"/>
-              <a:t>in your project</a:t>
-            </a:r>
-            <a:endParaRPr lang="en-IN" sz="2400" dirty="0"/>
-          </a:p>
-        </p:txBody>
-      </p:sp>
-    </p:spTree>
-    <p:extLst>
-      <p:ext uri="{BB962C8B-B14F-4D97-AF65-F5344CB8AC3E}">
-        <p14:creationId xmlns:p14="http://schemas.microsoft.com/office/powerpoint/2010/main" val="3279370306"/>
-      </p:ext>
-    </p:extLst>
-  </p:cSld>
-  <p:clrMapOvr>
-    <a:masterClrMapping/>
-  </p:clrMapOvr>
-</p:sld>
-</file>
-
-<file path=ppt/slides/slide52.xml><?xml version="1.0" encoding="utf-8"?>
-<p:sld xmlns:a="http://schemas.openxmlformats.org/drawingml/2006/main" xmlns:r="http://schemas.openxmlformats.org/officeDocument/2006/relationships" xmlns:p="http://schemas.openxmlformats.org/presentationml/2006/main">
-  <p:cSld>
-    <p:spTree>
-      <p:nvGrpSpPr>
-        <p:cNvPr id="1" name="">
-          <a:extLst>
-            <a:ext uri="{FF2B5EF4-FFF2-40B4-BE49-F238E27FC236}">
-              <a16:creationId xmlns:a16="http://schemas.microsoft.com/office/drawing/2014/main" id="{9D583944-3AAC-2EB5-16F5-07ED77E1EC21}"/>
-            </a:ext>
-          </a:extLst>
-        </p:cNvPr>
-        <p:cNvGrpSpPr/>
-        <p:nvPr/>
-      </p:nvGrpSpPr>
-      <p:grpSpPr>
-        <a:xfrm>
-          <a:off x="0" y="0"/>
-          <a:ext cx="0" cy="0"/>
-          <a:chOff x="0" y="0"/>
-          <a:chExt cx="0" cy="0"/>
-        </a:xfrm>
-      </p:grpSpPr>
-      <p:sp>
-        <p:nvSpPr>
-          <p:cNvPr id="3" name="Content Placeholder 2">
-            <a:extLst>
-              <a:ext uri="{FF2B5EF4-FFF2-40B4-BE49-F238E27FC236}">
-                <a16:creationId xmlns:a16="http://schemas.microsoft.com/office/drawing/2014/main" id="{5A8A250C-3D0F-0849-B09B-2A4A159E4F65}"/>
-              </a:ext>
-            </a:extLst>
-          </p:cNvPr>
-          <p:cNvSpPr>
-            <a:spLocks noGrp="1"/>
-          </p:cNvSpPr>
-          <p:nvPr>
-            <p:ph idx="1"/>
-          </p:nvPr>
-        </p:nvSpPr>
-        <p:spPr>
-          <a:xfrm>
-            <a:off x="766445" y="468085"/>
-            <a:ext cx="10659110" cy="5502049"/>
-          </a:xfrm>
-        </p:spPr>
-        <p:txBody>
-          <a:bodyPr>
-            <a:normAutofit/>
-          </a:bodyPr>
-          <a:lstStyle/>
-          <a:p>
-            <a:pPr marL="0" indent="0">
-              <a:buNone/>
-            </a:pPr>
-            <a:r>
-              <a:rPr lang="en-US" sz="2400" b="1" dirty="0"/>
-              <a:t>Creating a Local Module:</a:t>
-            </a:r>
-          </a:p>
-          <a:p>
-            <a:pPr marL="0" indent="0">
-              <a:buNone/>
-            </a:pPr>
-            <a:r>
-              <a:rPr lang="en-US" sz="2400" dirty="0"/>
-              <a:t>A local module is </a:t>
-            </a:r>
-            <a:r>
-              <a:rPr lang="en-US" sz="2400" b="1" dirty="0">
-                <a:solidFill>
-                  <a:srgbClr val="C00000"/>
-                </a:solidFill>
-              </a:rPr>
-              <a:t>just a JavaScript file </a:t>
-            </a:r>
-            <a:r>
-              <a:rPr lang="en-US" sz="2400" dirty="0"/>
-              <a:t>where you define your functionality </a:t>
-            </a:r>
-          </a:p>
-          <a:p>
-            <a:pPr marL="0" indent="0">
-              <a:buNone/>
-            </a:pPr>
-            <a:r>
-              <a:rPr lang="en-US" sz="2400" b="1" dirty="0"/>
-              <a:t>Example </a:t>
-            </a:r>
-            <a:r>
-              <a:rPr lang="en-IN" sz="2400" b="1" dirty="0"/>
-              <a:t>Project Structure:</a:t>
-            </a:r>
-            <a:endParaRPr lang="en-US" sz="2400" b="1" dirty="0"/>
-          </a:p>
-          <a:p>
-            <a:pPr marL="0" indent="0">
-              <a:buNone/>
-            </a:pPr>
-            <a:endParaRPr lang="en-US" sz="2400" dirty="0"/>
-          </a:p>
-          <a:p>
-            <a:pPr marL="0" indent="0">
-              <a:buNone/>
-            </a:pPr>
-            <a:endParaRPr lang="en-IN" sz="2400" dirty="0"/>
-          </a:p>
-        </p:txBody>
-      </p:sp>
-      <p:pic>
-        <p:nvPicPr>
-          <p:cNvPr id="4" name="Picture 3">
-            <a:extLst>
-              <a:ext uri="{FF2B5EF4-FFF2-40B4-BE49-F238E27FC236}">
-                <a16:creationId xmlns:a16="http://schemas.microsoft.com/office/drawing/2014/main" id="{862EC868-096E-1036-F721-98E1B696015F}"/>
-              </a:ext>
-            </a:extLst>
-          </p:cNvPr>
-          <p:cNvPicPr>
-            <a:picLocks noChangeAspect="1"/>
-          </p:cNvPicPr>
-          <p:nvPr/>
-        </p:nvPicPr>
-        <p:blipFill>
-          <a:blip r:embed="rId2"/>
-          <a:stretch>
-            <a:fillRect/>
-          </a:stretch>
-        </p:blipFill>
-        <p:spPr>
-          <a:xfrm>
-            <a:off x="3253143" y="2189915"/>
-            <a:ext cx="5237714" cy="3869065"/>
-          </a:xfrm>
-          <a:prstGeom prst="rect">
-            <a:avLst/>
-          </a:prstGeom>
-        </p:spPr>
-      </p:pic>
-    </p:spTree>
-    <p:extLst>
-      <p:ext uri="{BB962C8B-B14F-4D97-AF65-F5344CB8AC3E}">
-        <p14:creationId xmlns:p14="http://schemas.microsoft.com/office/powerpoint/2010/main" val="1417320102"/>
-      </p:ext>
-    </p:extLst>
-  </p:cSld>
-  <p:clrMapOvr>
-    <a:masterClrMapping/>
-  </p:clrMapOvr>
-</p:sld>
-</file>
-
-<file path=ppt/slides/slide53.xml><?xml version="1.0" encoding="utf-8"?>
-<p:sld xmlns:a="http://schemas.openxmlformats.org/drawingml/2006/main" xmlns:r="http://schemas.openxmlformats.org/officeDocument/2006/relationships" xmlns:p="http://schemas.openxmlformats.org/presentationml/2006/main">
-  <p:cSld>
-    <p:spTree>
-      <p:nvGrpSpPr>
-        <p:cNvPr id="1" name="">
-          <a:extLst>
-            <a:ext uri="{FF2B5EF4-FFF2-40B4-BE49-F238E27FC236}">
-              <a16:creationId xmlns:a16="http://schemas.microsoft.com/office/drawing/2014/main" id="{97ECE50E-6AC7-E4AD-07AC-927A70D2A898}"/>
-            </a:ext>
-          </a:extLst>
-        </p:cNvPr>
-        <p:cNvGrpSpPr/>
-        <p:nvPr/>
-      </p:nvGrpSpPr>
-      <p:grpSpPr>
-        <a:xfrm>
-          <a:off x="0" y="0"/>
-          <a:ext cx="0" cy="0"/>
-          <a:chOff x="0" y="0"/>
-          <a:chExt cx="0" cy="0"/>
-        </a:xfrm>
-      </p:grpSpPr>
-      <p:sp>
-        <p:nvSpPr>
-          <p:cNvPr id="3" name="Content Placeholder 2">
-            <a:extLst>
-              <a:ext uri="{FF2B5EF4-FFF2-40B4-BE49-F238E27FC236}">
-                <a16:creationId xmlns:a16="http://schemas.microsoft.com/office/drawing/2014/main" id="{34B2F09B-BF8C-E7A1-F92A-B9BA6E8F6B80}"/>
-              </a:ext>
-            </a:extLst>
-          </p:cNvPr>
-          <p:cNvSpPr>
-            <a:spLocks noGrp="1"/>
-          </p:cNvSpPr>
-          <p:nvPr>
-            <p:ph idx="1"/>
-          </p:nvPr>
-        </p:nvSpPr>
-        <p:spPr>
-          <a:xfrm>
-            <a:off x="777240" y="674914"/>
-            <a:ext cx="10659110" cy="5502049"/>
-          </a:xfrm>
-        </p:spPr>
-        <p:txBody>
-          <a:bodyPr>
-            <a:normAutofit/>
-          </a:bodyPr>
-          <a:lstStyle/>
-          <a:p>
-            <a:pPr marL="457200" indent="-457200">
-              <a:buAutoNum type="arabicPeriod"/>
-            </a:pPr>
-            <a:r>
-              <a:rPr lang="en-IN" sz="2400" b="1" dirty="0"/>
-              <a:t>utils.py:</a:t>
-            </a:r>
-          </a:p>
-          <a:p>
-            <a:pPr marL="457200" indent="-457200">
-              <a:buAutoNum type="arabicPeriod"/>
-            </a:pPr>
-            <a:endParaRPr lang="en-IN" sz="2400" b="1" dirty="0"/>
-          </a:p>
-          <a:p>
-            <a:pPr marL="457200" indent="-457200">
-              <a:buAutoNum type="arabicPeriod"/>
-            </a:pPr>
-            <a:endParaRPr lang="en-IN" sz="2400" b="1" dirty="0"/>
-          </a:p>
-          <a:p>
-            <a:pPr marL="457200" indent="-457200">
-              <a:buAutoNum type="arabicPeriod"/>
-            </a:pPr>
-            <a:endParaRPr lang="en-IN" sz="2400" b="1" dirty="0"/>
-          </a:p>
-          <a:p>
-            <a:pPr marL="457200" indent="-457200">
-              <a:buAutoNum type="arabicPeriod"/>
-            </a:pPr>
-            <a:endParaRPr lang="en-IN" sz="2400" b="1" dirty="0"/>
-          </a:p>
-          <a:p>
-            <a:pPr marL="457200" indent="-457200">
-              <a:buAutoNum type="arabicPeriod"/>
-            </a:pPr>
-            <a:r>
-              <a:rPr lang="en-IN" sz="2400" b="1" dirty="0"/>
-              <a:t>users.py</a:t>
-            </a:r>
-          </a:p>
-          <a:p>
-            <a:pPr marL="0" indent="0">
-              <a:buNone/>
-            </a:pPr>
-            <a:endParaRPr lang="en-IN" sz="2400" b="1" dirty="0">
-              <a:solidFill>
-                <a:srgbClr val="C00000"/>
-              </a:solidFill>
-            </a:endParaRPr>
-          </a:p>
-        </p:txBody>
-      </p:sp>
-      <p:pic>
-        <p:nvPicPr>
-          <p:cNvPr id="4" name="Picture 3">
-            <a:extLst>
-              <a:ext uri="{FF2B5EF4-FFF2-40B4-BE49-F238E27FC236}">
-                <a16:creationId xmlns:a16="http://schemas.microsoft.com/office/drawing/2014/main" id="{835B45A3-F628-52D3-93CA-9E1753955076}"/>
-              </a:ext>
-            </a:extLst>
-          </p:cNvPr>
-          <p:cNvPicPr>
-            <a:picLocks noChangeAspect="1"/>
-          </p:cNvPicPr>
-          <p:nvPr/>
-        </p:nvPicPr>
-        <p:blipFill>
-          <a:blip r:embed="rId2"/>
-          <a:stretch>
-            <a:fillRect/>
-          </a:stretch>
-        </p:blipFill>
-        <p:spPr>
-          <a:xfrm>
-            <a:off x="3273472" y="674914"/>
-            <a:ext cx="5669018" cy="1478874"/>
-          </a:xfrm>
-          <a:prstGeom prst="rect">
-            <a:avLst/>
-          </a:prstGeom>
-        </p:spPr>
-      </p:pic>
-      <p:pic>
-        <p:nvPicPr>
-          <p:cNvPr id="7" name="Picture 6">
-            <a:extLst>
-              <a:ext uri="{FF2B5EF4-FFF2-40B4-BE49-F238E27FC236}">
-                <a16:creationId xmlns:a16="http://schemas.microsoft.com/office/drawing/2014/main" id="{463A86F6-7BC4-038F-26CA-0FBD16F69649}"/>
-              </a:ext>
-            </a:extLst>
-          </p:cNvPr>
-          <p:cNvPicPr>
-            <a:picLocks noChangeAspect="1"/>
-          </p:cNvPicPr>
-          <p:nvPr/>
-        </p:nvPicPr>
-        <p:blipFill>
-          <a:blip r:embed="rId3"/>
-          <a:stretch>
-            <a:fillRect/>
-          </a:stretch>
-        </p:blipFill>
-        <p:spPr>
-          <a:xfrm>
-            <a:off x="3273472" y="2747629"/>
-            <a:ext cx="6015172" cy="3813540"/>
-          </a:xfrm>
-          <a:prstGeom prst="rect">
-            <a:avLst/>
-          </a:prstGeom>
-        </p:spPr>
-      </p:pic>
-    </p:spTree>
-    <p:extLst>
-      <p:ext uri="{BB962C8B-B14F-4D97-AF65-F5344CB8AC3E}">
-        <p14:creationId xmlns:p14="http://schemas.microsoft.com/office/powerpoint/2010/main" val="4187949477"/>
-      </p:ext>
-    </p:extLst>
-  </p:cSld>
-  <p:clrMapOvr>
-    <a:masterClrMapping/>
-  </p:clrMapOvr>
-</p:sld>
-</file>
-
-<file path=ppt/slides/slide54.xml><?xml version="1.0" encoding="utf-8"?>
-<p:sld xmlns:a="http://schemas.openxmlformats.org/drawingml/2006/main" xmlns:r="http://schemas.openxmlformats.org/officeDocument/2006/relationships" xmlns:p="http://schemas.openxmlformats.org/presentationml/2006/main">
-  <p:cSld>
-    <p:spTree>
-      <p:nvGrpSpPr>
-        <p:cNvPr id="1" name="">
-          <a:extLst>
-            <a:ext uri="{FF2B5EF4-FFF2-40B4-BE49-F238E27FC236}">
-              <a16:creationId xmlns:a16="http://schemas.microsoft.com/office/drawing/2014/main" id="{156A9EB4-9840-8BB0-AD8F-F0D3648FA5AC}"/>
-            </a:ext>
-          </a:extLst>
-        </p:cNvPr>
-        <p:cNvGrpSpPr/>
-        <p:nvPr/>
-      </p:nvGrpSpPr>
-      <p:grpSpPr>
-        <a:xfrm>
-          <a:off x="0" y="0"/>
-          <a:ext cx="0" cy="0"/>
-          <a:chOff x="0" y="0"/>
-          <a:chExt cx="0" cy="0"/>
-        </a:xfrm>
-      </p:grpSpPr>
-      <p:sp>
-        <p:nvSpPr>
-          <p:cNvPr id="3" name="Content Placeholder 2">
-            <a:extLst>
-              <a:ext uri="{FF2B5EF4-FFF2-40B4-BE49-F238E27FC236}">
-                <a16:creationId xmlns:a16="http://schemas.microsoft.com/office/drawing/2014/main" id="{B7F95E68-7228-F472-D99B-68B070A9BCA7}"/>
-              </a:ext>
-            </a:extLst>
-          </p:cNvPr>
-          <p:cNvSpPr>
-            <a:spLocks noGrp="1"/>
-          </p:cNvSpPr>
-          <p:nvPr>
-            <p:ph idx="1"/>
-          </p:nvPr>
-        </p:nvSpPr>
-        <p:spPr>
-          <a:xfrm>
-            <a:off x="777240" y="674914"/>
-            <a:ext cx="10659110" cy="5693229"/>
-          </a:xfrm>
-        </p:spPr>
-        <p:txBody>
-          <a:bodyPr>
-            <a:normAutofit/>
-          </a:bodyPr>
-          <a:lstStyle/>
-          <a:p>
-            <a:pPr marL="0" indent="0">
-              <a:buNone/>
-            </a:pPr>
-            <a:r>
-              <a:rPr lang="en-US" sz="2800" b="1" dirty="0"/>
-              <a:t>3. Third-party Modules:</a:t>
-            </a:r>
-          </a:p>
-          <a:p>
-            <a:pPr marL="0" indent="0">
-              <a:buNone/>
-            </a:pPr>
-            <a:r>
-              <a:rPr lang="en-US" sz="2400" b="1" dirty="0"/>
-              <a:t>Third-party modules</a:t>
-            </a:r>
-            <a:r>
-              <a:rPr lang="en-US" sz="2400" dirty="0"/>
-              <a:t> in Python are </a:t>
-            </a:r>
-            <a:r>
-              <a:rPr lang="en-US" sz="2400" b="1" dirty="0">
-                <a:solidFill>
-                  <a:srgbClr val="C00000"/>
-                </a:solidFill>
-              </a:rPr>
-              <a:t>external packages </a:t>
-            </a:r>
-            <a:r>
-              <a:rPr lang="en-US" sz="2400" b="1" dirty="0"/>
-              <a:t>created by the </a:t>
-            </a:r>
-            <a:r>
-              <a:rPr lang="en-US" sz="2400" b="1" dirty="0">
-                <a:solidFill>
-                  <a:srgbClr val="C00000"/>
-                </a:solidFill>
-              </a:rPr>
-              <a:t>developer community </a:t>
-            </a:r>
-            <a:r>
-              <a:rPr lang="en-US" sz="2400" dirty="0"/>
-              <a:t>and </a:t>
-            </a:r>
-            <a:r>
-              <a:rPr lang="en-US" sz="2400" b="1" dirty="0"/>
-              <a:t>published to </a:t>
-            </a:r>
-            <a:r>
-              <a:rPr lang="en-US" sz="2400" dirty="0"/>
-              <a:t>the </a:t>
-            </a:r>
-            <a:r>
-              <a:rPr lang="en-US" sz="2400" b="1" dirty="0">
-                <a:solidFill>
-                  <a:srgbClr val="C00000"/>
-                </a:solidFill>
-              </a:rPr>
-              <a:t>pip</a:t>
-            </a:r>
-            <a:r>
-              <a:rPr lang="en-US" sz="2400" b="1" dirty="0"/>
-              <a:t> (Python Package Index)</a:t>
-            </a:r>
-            <a:r>
-              <a:rPr lang="en-US" sz="2400" dirty="0"/>
-              <a:t> </a:t>
-            </a:r>
-            <a:r>
-              <a:rPr lang="en-US" sz="2400" b="1" dirty="0"/>
-              <a:t>repository</a:t>
-            </a:r>
-            <a:r>
-              <a:rPr lang="en-US" sz="2400" dirty="0"/>
-              <a:t>. These modules extend the functionality of Python, allowing developers to use pre-built solutions </a:t>
-            </a:r>
-            <a:r>
-              <a:rPr lang="en-US" sz="2400" b="1" dirty="0">
-                <a:solidFill>
-                  <a:srgbClr val="002060"/>
-                </a:solidFill>
-              </a:rPr>
-              <a:t>instead of writing everything from scratch</a:t>
-            </a:r>
-            <a:r>
-              <a:rPr lang="en-US" sz="2400" dirty="0"/>
-              <a:t>.</a:t>
-            </a:r>
-          </a:p>
-          <a:p>
-            <a:pPr marL="0" indent="0">
-              <a:buNone/>
-            </a:pPr>
-            <a:r>
-              <a:rPr lang="en-US" sz="2400" b="1" dirty="0"/>
-              <a:t>Characteristics of Third-party Modules</a:t>
-            </a:r>
-          </a:p>
-          <a:p>
-            <a:pPr>
-              <a:buFont typeface="+mj-lt"/>
-              <a:buAutoNum type="arabicPeriod"/>
-            </a:pPr>
-            <a:r>
-              <a:rPr lang="en-US" sz="2400" b="1" dirty="0"/>
-              <a:t>Community-driven</a:t>
-            </a:r>
-            <a:r>
-              <a:rPr lang="en-US" sz="2400" dirty="0"/>
-              <a:t>: Developed and maintained by the Python</a:t>
-            </a:r>
-            <a:r>
-              <a:rPr lang="en-US" sz="2400" b="1" dirty="0">
-                <a:solidFill>
-                  <a:srgbClr val="002060"/>
-                </a:solidFill>
-              </a:rPr>
-              <a:t> community</a:t>
-            </a:r>
-            <a:r>
-              <a:rPr lang="en-US" sz="2400" b="1" dirty="0"/>
-              <a:t> </a:t>
-            </a:r>
-            <a:r>
-              <a:rPr lang="en-US" sz="2400" dirty="0"/>
-              <a:t>or </a:t>
-            </a:r>
-            <a:r>
-              <a:rPr lang="en-US" sz="2400" b="1" dirty="0">
-                <a:solidFill>
-                  <a:srgbClr val="002060"/>
-                </a:solidFill>
-              </a:rPr>
-              <a:t>organizations</a:t>
-            </a:r>
-            <a:r>
-              <a:rPr lang="en-US" sz="2400" dirty="0"/>
-              <a:t>.</a:t>
-            </a:r>
-          </a:p>
-          <a:p>
-            <a:pPr>
-              <a:buFont typeface="+mj-lt"/>
-              <a:buAutoNum type="arabicPeriod"/>
-            </a:pPr>
-            <a:r>
-              <a:rPr lang="en-US" sz="2400" b="1" dirty="0"/>
-              <a:t>Installable via </a:t>
-            </a:r>
-            <a:r>
-              <a:rPr lang="en-US" sz="2400" b="1" dirty="0" err="1"/>
-              <a:t>npm</a:t>
-            </a:r>
-            <a:r>
-              <a:rPr lang="en-US" sz="2400" dirty="0"/>
-              <a:t>: Available in the </a:t>
-            </a:r>
-            <a:r>
-              <a:rPr lang="en-US" sz="2400" b="1" dirty="0"/>
-              <a:t>pip</a:t>
-            </a:r>
-            <a:r>
-              <a:rPr lang="en-US" sz="2400" dirty="0"/>
-              <a:t> </a:t>
-            </a:r>
-            <a:r>
-              <a:rPr lang="en-US" sz="2400" b="1" dirty="0">
-                <a:solidFill>
-                  <a:srgbClr val="002060"/>
-                </a:solidFill>
-              </a:rPr>
-              <a:t>registry</a:t>
-            </a:r>
-            <a:r>
-              <a:rPr lang="en-US" sz="2400" dirty="0"/>
-              <a:t> and installed using the pip command-line tool.</a:t>
-            </a:r>
-          </a:p>
-          <a:p>
-            <a:pPr>
-              <a:buFont typeface="+mj-lt"/>
-              <a:buAutoNum type="arabicPeriod"/>
-            </a:pPr>
-            <a:r>
-              <a:rPr lang="en-US" sz="2400" b="1" dirty="0"/>
-              <a:t>Reusable</a:t>
-            </a:r>
-            <a:r>
-              <a:rPr lang="en-US" sz="2400" dirty="0"/>
-              <a:t>: Can be used across multiple projects.</a:t>
-            </a:r>
-          </a:p>
-          <a:p>
-            <a:pPr>
-              <a:buFont typeface="+mj-lt"/>
-              <a:buAutoNum type="arabicPeriod"/>
-            </a:pPr>
-            <a:r>
-              <a:rPr lang="en-US" sz="2400" b="1" dirty="0"/>
-              <a:t>Versioned</a:t>
-            </a:r>
-            <a:r>
-              <a:rPr lang="en-US" sz="2400" dirty="0"/>
-              <a:t>: Versions are maintained to ensure </a:t>
-            </a:r>
-            <a:r>
-              <a:rPr lang="en-US" sz="2400" b="1" dirty="0"/>
-              <a:t>stability</a:t>
-            </a:r>
-            <a:r>
-              <a:rPr lang="en-US" sz="2400" dirty="0"/>
-              <a:t> and </a:t>
-            </a:r>
-            <a:r>
-              <a:rPr lang="en-US" sz="2400" b="1" dirty="0"/>
-              <a:t>compatibility</a:t>
-            </a:r>
-            <a:r>
-              <a:rPr lang="en-US" sz="2400" dirty="0"/>
-              <a:t>.</a:t>
-            </a:r>
-          </a:p>
-          <a:p>
-            <a:pPr>
-              <a:buFont typeface="+mj-lt"/>
-              <a:buAutoNum type="arabicPeriod"/>
-            </a:pPr>
-            <a:r>
-              <a:rPr lang="en-US" sz="2400" b="1" dirty="0"/>
-              <a:t>Examples</a:t>
-            </a:r>
-            <a:r>
-              <a:rPr lang="en-US" sz="2400" dirty="0"/>
-              <a:t> </a:t>
-            </a:r>
-            <a:r>
-              <a:rPr lang="en-US" sz="2400" b="1" dirty="0"/>
-              <a:t>of Popular Third-party Modules: </a:t>
-            </a:r>
-            <a:r>
-              <a:rPr lang="en-US" sz="2400" b="1" dirty="0">
-                <a:solidFill>
-                  <a:srgbClr val="002060"/>
-                </a:solidFill>
-              </a:rPr>
-              <a:t>Express: </a:t>
-            </a:r>
-            <a:r>
-              <a:rPr lang="en-IN" sz="2400" b="1" dirty="0" err="1"/>
-              <a:t>fastapi</a:t>
-            </a:r>
-            <a:r>
-              <a:rPr lang="en-IN" sz="2400" b="1" dirty="0">
-                <a:solidFill>
-                  <a:srgbClr val="002060"/>
-                </a:solidFill>
-              </a:rPr>
-              <a:t>, </a:t>
-            </a:r>
-            <a:r>
-              <a:rPr lang="en-IN" sz="2400" b="1" dirty="0" err="1"/>
-              <a:t>uvicorn</a:t>
-            </a:r>
-            <a:r>
-              <a:rPr lang="en-IN" sz="2400" dirty="0"/>
-              <a:t>, </a:t>
-            </a:r>
-            <a:r>
-              <a:rPr lang="en-IN" sz="2400" b="1" dirty="0"/>
-              <a:t>Pandas</a:t>
-            </a:r>
-            <a:r>
-              <a:rPr lang="en-IN" sz="2400" dirty="0"/>
-              <a:t>, </a:t>
-            </a:r>
-            <a:r>
-              <a:rPr lang="en-IN" sz="2400" b="1" dirty="0" err="1"/>
-              <a:t>numpy</a:t>
-            </a:r>
-            <a:r>
-              <a:rPr lang="en-IN" sz="2400" b="1" dirty="0"/>
-              <a:t>, etc</a:t>
-            </a:r>
-            <a:r>
-              <a:rPr lang="en-IN" sz="2400" dirty="0"/>
-              <a:t>.</a:t>
-            </a:r>
-            <a:r>
-              <a:rPr lang="en-IN" sz="2400" b="1" dirty="0">
-                <a:solidFill>
-                  <a:srgbClr val="002060"/>
-                </a:solidFill>
-              </a:rPr>
-              <a:t> </a:t>
-            </a:r>
-            <a:endParaRPr lang="en-US" sz="2400" b="1" dirty="0">
-              <a:solidFill>
-                <a:srgbClr val="002060"/>
-              </a:solidFill>
-            </a:endParaRPr>
-          </a:p>
-          <a:p>
-            <a:pPr marL="0" indent="0">
-              <a:buNone/>
-            </a:pPr>
-            <a:endParaRPr lang="en-IN" sz="2400" dirty="0"/>
-          </a:p>
-        </p:txBody>
-      </p:sp>
-    </p:spTree>
-    <p:extLst>
-      <p:ext uri="{BB962C8B-B14F-4D97-AF65-F5344CB8AC3E}">
-        <p14:creationId xmlns:p14="http://schemas.microsoft.com/office/powerpoint/2010/main" val="250238104"/>
-      </p:ext>
-    </p:extLst>
-  </p:cSld>
-  <p:clrMapOvr>
-    <a:masterClrMapping/>
-  </p:clrMapOvr>
-</p:sld>
-</file>
-
-<file path=ppt/slides/slide55.xml><?xml version="1.0" encoding="utf-8"?>
-<p:sld xmlns:a="http://schemas.openxmlformats.org/drawingml/2006/main" xmlns:r="http://schemas.openxmlformats.org/officeDocument/2006/relationships" xmlns:p="http://schemas.openxmlformats.org/presentationml/2006/main">
-  <p:cSld>
-    <p:spTree>
-      <p:nvGrpSpPr>
-        <p:cNvPr id="1" name="">
-          <a:extLst>
-            <a:ext uri="{FF2B5EF4-FFF2-40B4-BE49-F238E27FC236}">
-              <a16:creationId xmlns:a16="http://schemas.microsoft.com/office/drawing/2014/main" id="{74F25D90-DD57-7635-6681-64BF7D4F2252}"/>
-            </a:ext>
-          </a:extLst>
-        </p:cNvPr>
-        <p:cNvGrpSpPr/>
-        <p:nvPr/>
-      </p:nvGrpSpPr>
-      <p:grpSpPr>
-        <a:xfrm>
-          <a:off x="0" y="0"/>
-          <a:ext cx="0" cy="0"/>
-          <a:chOff x="0" y="0"/>
-          <a:chExt cx="0" cy="0"/>
-        </a:xfrm>
-      </p:grpSpPr>
-      <p:sp>
-        <p:nvSpPr>
-          <p:cNvPr id="3" name="Content Placeholder 2">
-            <a:extLst>
-              <a:ext uri="{FF2B5EF4-FFF2-40B4-BE49-F238E27FC236}">
-                <a16:creationId xmlns:a16="http://schemas.microsoft.com/office/drawing/2014/main" id="{85CFF317-E40F-0D99-8488-5F3F39D3064B}"/>
-              </a:ext>
-            </a:extLst>
-          </p:cNvPr>
-          <p:cNvSpPr>
-            <a:spLocks noGrp="1"/>
-          </p:cNvSpPr>
-          <p:nvPr>
-            <p:ph idx="1"/>
-          </p:nvPr>
-        </p:nvSpPr>
-        <p:spPr>
-          <a:xfrm>
-            <a:off x="777240" y="674914"/>
-            <a:ext cx="10659110" cy="5502049"/>
-          </a:xfrm>
-        </p:spPr>
-        <p:txBody>
-          <a:bodyPr>
-            <a:normAutofit/>
-          </a:bodyPr>
-          <a:lstStyle/>
-          <a:p>
-            <a:pPr marL="0" indent="0">
-              <a:buNone/>
-            </a:pPr>
-            <a:r>
-              <a:rPr lang="en-US" sz="2400" b="1" dirty="0"/>
-              <a:t>How to Use Third-party Modules:</a:t>
-            </a:r>
-          </a:p>
-          <a:p>
-            <a:pPr marL="0" indent="0">
-              <a:buNone/>
-            </a:pPr>
-            <a:r>
-              <a:rPr lang="en-US" sz="2400" b="1" dirty="0"/>
-              <a:t>1. Install the Module: </a:t>
-            </a:r>
-            <a:r>
-              <a:rPr lang="en-US" sz="2400" dirty="0"/>
-              <a:t>Use </a:t>
-            </a:r>
-            <a:r>
-              <a:rPr lang="en-US" sz="2400" b="1" dirty="0">
-                <a:solidFill>
-                  <a:srgbClr val="C00000"/>
-                </a:solidFill>
-              </a:rPr>
-              <a:t>pip install </a:t>
-            </a:r>
-            <a:r>
-              <a:rPr lang="en-US" sz="2400" dirty="0"/>
-              <a:t>to add the module to your project:</a:t>
-            </a:r>
-          </a:p>
-          <a:p>
-            <a:endParaRPr lang="en-US" sz="2400" dirty="0"/>
-          </a:p>
-          <a:p>
-            <a:endParaRPr lang="en-US" sz="2400" dirty="0"/>
-          </a:p>
-          <a:p>
-            <a:endParaRPr lang="en-US" sz="2400" dirty="0"/>
-          </a:p>
-          <a:p>
-            <a:pPr marL="0" indent="0">
-              <a:buNone/>
-            </a:pPr>
-            <a:r>
-              <a:rPr lang="en-US" sz="2400" b="1" dirty="0"/>
-              <a:t>2. Import the Module: </a:t>
-            </a:r>
-            <a:r>
-              <a:rPr lang="en-US" sz="2400" b="1" dirty="0">
-                <a:solidFill>
-                  <a:srgbClr val="002060"/>
-                </a:solidFill>
-              </a:rPr>
-              <a:t>Import</a:t>
-            </a:r>
-            <a:r>
-              <a:rPr lang="en-US" sz="2400" dirty="0"/>
-              <a:t> </a:t>
-            </a:r>
-            <a:r>
-              <a:rPr lang="en-US" sz="2400" b="1" dirty="0"/>
-              <a:t>the module </a:t>
-            </a:r>
-            <a:r>
-              <a:rPr lang="en-US" sz="2400" dirty="0"/>
-              <a:t>in your Python file using </a:t>
-            </a:r>
-            <a:r>
-              <a:rPr lang="en-US" sz="2400" b="1" dirty="0"/>
-              <a:t>import</a:t>
-            </a:r>
-            <a:r>
-              <a:rPr lang="en-US" sz="2400" b="1" dirty="0">
-                <a:solidFill>
-                  <a:srgbClr val="002060"/>
-                </a:solidFill>
-              </a:rPr>
-              <a:t>:</a:t>
-            </a:r>
-          </a:p>
-          <a:p>
-            <a:pPr marL="0" indent="0">
-              <a:buNone/>
-            </a:pPr>
-            <a:endParaRPr lang="en-US" sz="2400" b="1" dirty="0">
-              <a:solidFill>
-                <a:srgbClr val="002060"/>
-              </a:solidFill>
-            </a:endParaRPr>
-          </a:p>
-          <a:p>
-            <a:pPr marL="0" indent="0">
-              <a:buNone/>
-            </a:pPr>
-            <a:endParaRPr lang="en-IN" sz="2400" b="1" dirty="0">
-              <a:solidFill>
-                <a:srgbClr val="002060"/>
-              </a:solidFill>
-            </a:endParaRPr>
-          </a:p>
-          <a:p>
-            <a:pPr marL="0" indent="0">
-              <a:buNone/>
-            </a:pPr>
-            <a:endParaRPr lang="en-IN" sz="2400" b="1" dirty="0">
-              <a:solidFill>
-                <a:srgbClr val="002060"/>
-              </a:solidFill>
-            </a:endParaRPr>
-          </a:p>
-          <a:p>
-            <a:pPr marL="0" indent="0">
-              <a:buNone/>
-            </a:pPr>
-            <a:r>
-              <a:rPr lang="en-US" sz="2400" b="1" dirty="0">
-                <a:solidFill>
-                  <a:schemeClr val="tx1"/>
-                </a:solidFill>
-              </a:rPr>
-              <a:t>3. Use the Module: </a:t>
-            </a:r>
-            <a:r>
-              <a:rPr lang="en-US" sz="2400" b="1" dirty="0">
-                <a:solidFill>
-                  <a:srgbClr val="002060"/>
-                </a:solidFill>
-              </a:rPr>
-              <a:t>Call</a:t>
-            </a:r>
-            <a:r>
-              <a:rPr lang="en-US" sz="2400" dirty="0">
-                <a:solidFill>
-                  <a:schemeClr val="tx1"/>
-                </a:solidFill>
-              </a:rPr>
-              <a:t> the </a:t>
-            </a:r>
-            <a:r>
-              <a:rPr lang="en-US" sz="2400" b="1" dirty="0">
-                <a:solidFill>
-                  <a:schemeClr val="tx1"/>
-                </a:solidFill>
-              </a:rPr>
-              <a:t>functions</a:t>
-            </a:r>
-            <a:r>
-              <a:rPr lang="en-US" sz="2400" dirty="0">
-                <a:solidFill>
-                  <a:schemeClr val="tx1"/>
-                </a:solidFill>
-              </a:rPr>
-              <a:t> or use the </a:t>
-            </a:r>
-            <a:r>
-              <a:rPr lang="en-US" sz="2400" b="1" dirty="0">
-                <a:solidFill>
-                  <a:schemeClr val="tx1"/>
-                </a:solidFill>
-              </a:rPr>
-              <a:t>classes</a:t>
-            </a:r>
-            <a:r>
-              <a:rPr lang="en-US" sz="2400" dirty="0">
-                <a:solidFill>
-                  <a:schemeClr val="tx1"/>
-                </a:solidFill>
-              </a:rPr>
-              <a:t> provided by the module in your application.</a:t>
-            </a:r>
-            <a:endParaRPr lang="en-IN" sz="2400" dirty="0">
-              <a:solidFill>
-                <a:schemeClr val="tx1"/>
-              </a:solidFill>
-            </a:endParaRPr>
-          </a:p>
-        </p:txBody>
-      </p:sp>
-      <p:pic>
-        <p:nvPicPr>
-          <p:cNvPr id="6" name="Picture 5">
-            <a:extLst>
-              <a:ext uri="{FF2B5EF4-FFF2-40B4-BE49-F238E27FC236}">
-                <a16:creationId xmlns:a16="http://schemas.microsoft.com/office/drawing/2014/main" id="{AC525010-61D2-60D1-1669-58F08CACBC88}"/>
-              </a:ext>
-            </a:extLst>
-          </p:cNvPr>
-          <p:cNvPicPr>
-            <a:picLocks noChangeAspect="1"/>
-          </p:cNvPicPr>
-          <p:nvPr/>
-        </p:nvPicPr>
-        <p:blipFill>
-          <a:blip r:embed="rId2"/>
-          <a:stretch>
-            <a:fillRect/>
-          </a:stretch>
-        </p:blipFill>
-        <p:spPr>
-          <a:xfrm>
-            <a:off x="2009495" y="1763226"/>
-            <a:ext cx="5055333" cy="796234"/>
-          </a:xfrm>
-          <a:prstGeom prst="rect">
-            <a:avLst/>
-          </a:prstGeom>
-        </p:spPr>
-      </p:pic>
-      <p:pic>
-        <p:nvPicPr>
-          <p:cNvPr id="9" name="Picture 8">
-            <a:extLst>
-              <a:ext uri="{FF2B5EF4-FFF2-40B4-BE49-F238E27FC236}">
-                <a16:creationId xmlns:a16="http://schemas.microsoft.com/office/drawing/2014/main" id="{48D8ADC6-7662-1F3B-FDAC-9080CF7CD0B8}"/>
-              </a:ext>
-            </a:extLst>
-          </p:cNvPr>
-          <p:cNvPicPr>
-            <a:picLocks noChangeAspect="1"/>
-          </p:cNvPicPr>
-          <p:nvPr/>
-        </p:nvPicPr>
-        <p:blipFill>
-          <a:blip r:embed="rId3"/>
-          <a:stretch>
-            <a:fillRect/>
-          </a:stretch>
-        </p:blipFill>
-        <p:spPr>
-          <a:xfrm>
-            <a:off x="2328496" y="3505943"/>
-            <a:ext cx="4290018" cy="856372"/>
-          </a:xfrm>
-          <a:prstGeom prst="rect">
-            <a:avLst/>
-          </a:prstGeom>
-        </p:spPr>
-      </p:pic>
-      <p:pic>
-        <p:nvPicPr>
-          <p:cNvPr id="11" name="Picture 10">
-            <a:extLst>
-              <a:ext uri="{FF2B5EF4-FFF2-40B4-BE49-F238E27FC236}">
-                <a16:creationId xmlns:a16="http://schemas.microsoft.com/office/drawing/2014/main" id="{D425886E-A48C-411D-63E6-05E692E0CD12}"/>
-              </a:ext>
-            </a:extLst>
-          </p:cNvPr>
-          <p:cNvPicPr>
-            <a:picLocks noChangeAspect="1"/>
-          </p:cNvPicPr>
-          <p:nvPr/>
-        </p:nvPicPr>
-        <p:blipFill>
-          <a:blip r:embed="rId4"/>
-          <a:stretch>
-            <a:fillRect/>
-          </a:stretch>
-        </p:blipFill>
-        <p:spPr>
-          <a:xfrm>
-            <a:off x="2328496" y="5636810"/>
-            <a:ext cx="5400000" cy="809524"/>
-          </a:xfrm>
-          <a:prstGeom prst="rect">
-            <a:avLst/>
-          </a:prstGeom>
-        </p:spPr>
-      </p:pic>
-    </p:spTree>
-    <p:extLst>
-      <p:ext uri="{BB962C8B-B14F-4D97-AF65-F5344CB8AC3E}">
-        <p14:creationId xmlns:p14="http://schemas.microsoft.com/office/powerpoint/2010/main" val="3306552090"/>
-      </p:ext>
-    </p:extLst>
-  </p:cSld>
-  <p:clrMapOvr>
-    <a:masterClrMapping/>
-  </p:clrMapOvr>
-</p:sld>
-</file>
-
-<file path=ppt/slides/slide56.xml><?xml version="1.0" encoding="utf-8"?>
-<p:sld xmlns:a="http://schemas.openxmlformats.org/drawingml/2006/main" xmlns:r="http://schemas.openxmlformats.org/officeDocument/2006/relationships" xmlns:p="http://schemas.openxmlformats.org/presentationml/2006/main">
-  <p:cSld>
-    <p:spTree>
-      <p:nvGrpSpPr>
-        <p:cNvPr id="1" name="">
-          <a:extLst>
-            <a:ext uri="{FF2B5EF4-FFF2-40B4-BE49-F238E27FC236}">
-              <a16:creationId xmlns:a16="http://schemas.microsoft.com/office/drawing/2014/main" id="{B6ABE3A6-D2B0-ADA9-078C-2204DC9FBE4A}"/>
-            </a:ext>
-          </a:extLst>
-        </p:cNvPr>
-        <p:cNvGrpSpPr/>
-        <p:nvPr/>
-      </p:nvGrpSpPr>
-      <p:grpSpPr>
-        <a:xfrm>
-          <a:off x="0" y="0"/>
-          <a:ext cx="0" cy="0"/>
-          <a:chOff x="0" y="0"/>
-          <a:chExt cx="0" cy="0"/>
-        </a:xfrm>
-      </p:grpSpPr>
-      <p:sp>
-        <p:nvSpPr>
-          <p:cNvPr id="3" name="Content Placeholder 2">
-            <a:extLst>
-              <a:ext uri="{FF2B5EF4-FFF2-40B4-BE49-F238E27FC236}">
-                <a16:creationId xmlns:a16="http://schemas.microsoft.com/office/drawing/2014/main" id="{72BF39CD-4300-F7BB-63B6-60988B2C29E5}"/>
-              </a:ext>
-            </a:extLst>
-          </p:cNvPr>
-          <p:cNvSpPr>
-            <a:spLocks noGrp="1"/>
-          </p:cNvSpPr>
-          <p:nvPr>
-            <p:ph idx="1"/>
-          </p:nvPr>
-        </p:nvSpPr>
-        <p:spPr>
-          <a:xfrm>
-            <a:off x="777240" y="696686"/>
-            <a:ext cx="10659110" cy="5480277"/>
-          </a:xfrm>
-        </p:spPr>
-        <p:txBody>
-          <a:bodyPr>
-            <a:normAutofit/>
-          </a:bodyPr>
-          <a:lstStyle/>
-          <a:p>
-            <a:pPr marL="0" indent="0">
-              <a:buNone/>
-            </a:pPr>
-            <a:endParaRPr lang="en-IN" sz="2400" dirty="0"/>
-          </a:p>
-        </p:txBody>
-      </p:sp>
-    </p:spTree>
-    <p:extLst>
-      <p:ext uri="{BB962C8B-B14F-4D97-AF65-F5344CB8AC3E}">
-        <p14:creationId xmlns:p14="http://schemas.microsoft.com/office/powerpoint/2010/main" val="3183652202"/>
-      </p:ext>
-    </p:extLst>
-  </p:cSld>
-  <p:clrMapOvr>
-    <a:masterClrMapping/>
-  </p:clrMapOvr>
-</p:sld>
-</file>
-
-<file path=ppt/slides/slide57.xml><?xml version="1.0" encoding="utf-8"?>
-<p:sld xmlns:a="http://schemas.openxmlformats.org/drawingml/2006/main" xmlns:r="http://schemas.openxmlformats.org/officeDocument/2006/relationships" xmlns:p="http://schemas.openxmlformats.org/presentationml/2006/main">
-  <p:cSld>
-    <p:spTree>
-      <p:nvGrpSpPr>
-        <p:cNvPr id="1" name="">
-          <a:extLst>
-            <a:ext uri="{FF2B5EF4-FFF2-40B4-BE49-F238E27FC236}">
-              <a16:creationId xmlns:a16="http://schemas.microsoft.com/office/drawing/2014/main" id="{AE76F0C9-0F14-9401-9CDE-6C8355A40673}"/>
-            </a:ext>
-          </a:extLst>
-        </p:cNvPr>
-        <p:cNvGrpSpPr/>
-        <p:nvPr/>
-      </p:nvGrpSpPr>
-      <p:grpSpPr>
-        <a:xfrm>
-          <a:off x="0" y="0"/>
-          <a:ext cx="0" cy="0"/>
-          <a:chOff x="0" y="0"/>
-          <a:chExt cx="0" cy="0"/>
-        </a:xfrm>
-      </p:grpSpPr>
-      <p:sp>
-        <p:nvSpPr>
-          <p:cNvPr id="3" name="Content Placeholder 2">
-            <a:extLst>
-              <a:ext uri="{FF2B5EF4-FFF2-40B4-BE49-F238E27FC236}">
-                <a16:creationId xmlns:a16="http://schemas.microsoft.com/office/drawing/2014/main" id="{DB144146-02E9-F2E9-8E92-7F25EF4CC958}"/>
-              </a:ext>
-            </a:extLst>
-          </p:cNvPr>
-          <p:cNvSpPr>
-            <a:spLocks noGrp="1"/>
-          </p:cNvSpPr>
-          <p:nvPr>
-            <p:ph idx="1"/>
-          </p:nvPr>
-        </p:nvSpPr>
-        <p:spPr>
-          <a:xfrm>
-            <a:off x="777240" y="696686"/>
-            <a:ext cx="10659110" cy="5480277"/>
-          </a:xfrm>
-        </p:spPr>
-        <p:txBody>
-          <a:bodyPr>
-            <a:normAutofit/>
-          </a:bodyPr>
-          <a:lstStyle/>
-          <a:p>
-            <a:pPr marL="0" indent="0">
-              <a:buNone/>
-            </a:pPr>
-            <a:endParaRPr lang="en-IN" sz="2400" dirty="0"/>
-          </a:p>
-        </p:txBody>
-      </p:sp>
-    </p:spTree>
-    <p:extLst>
-      <p:ext uri="{BB962C8B-B14F-4D97-AF65-F5344CB8AC3E}">
-        <p14:creationId xmlns:p14="http://schemas.microsoft.com/office/powerpoint/2010/main" val="2647842385"/>
-      </p:ext>
-    </p:extLst>
-  </p:cSld>
-  <p:clrMapOvr>
-    <a:masterClrMapping/>
-  </p:clrMapOvr>
-</p:sld>
-</file>
-
-<file path=ppt/slides/slide58.xml><?xml version="1.0" encoding="utf-8"?>
-<p:sld xmlns:a="http://schemas.openxmlformats.org/drawingml/2006/main" xmlns:r="http://schemas.openxmlformats.org/officeDocument/2006/relationships" xmlns:p="http://schemas.openxmlformats.org/presentationml/2006/main">
-  <p:cSld>
-    <p:spTree>
-      <p:nvGrpSpPr>
-        <p:cNvPr id="1" name="">
-          <a:extLst>
-            <a:ext uri="{FF2B5EF4-FFF2-40B4-BE49-F238E27FC236}">
-              <a16:creationId xmlns:a16="http://schemas.microsoft.com/office/drawing/2014/main" id="{8A29DBAB-3C96-2A5F-6FEE-FB123BFADED1}"/>
-            </a:ext>
-          </a:extLst>
-        </p:cNvPr>
-        <p:cNvGrpSpPr/>
-        <p:nvPr/>
-      </p:nvGrpSpPr>
-      <p:grpSpPr>
-        <a:xfrm>
-          <a:off x="0" y="0"/>
-          <a:ext cx="0" cy="0"/>
-          <a:chOff x="0" y="0"/>
-          <a:chExt cx="0" cy="0"/>
-        </a:xfrm>
-      </p:grpSpPr>
-      <p:sp>
-        <p:nvSpPr>
-          <p:cNvPr id="3" name="Content Placeholder 2">
-            <a:extLst>
-              <a:ext uri="{FF2B5EF4-FFF2-40B4-BE49-F238E27FC236}">
-                <a16:creationId xmlns:a16="http://schemas.microsoft.com/office/drawing/2014/main" id="{D2BF9621-BB4C-868D-8B8B-2F5080A51960}"/>
-              </a:ext>
-            </a:extLst>
-          </p:cNvPr>
-          <p:cNvSpPr>
-            <a:spLocks noGrp="1"/>
-          </p:cNvSpPr>
-          <p:nvPr>
-            <p:ph idx="1"/>
-          </p:nvPr>
-        </p:nvSpPr>
-        <p:spPr>
-          <a:xfrm>
-            <a:off x="777240" y="696686"/>
-            <a:ext cx="10659110" cy="5480277"/>
-          </a:xfrm>
-        </p:spPr>
-        <p:txBody>
-          <a:bodyPr>
-            <a:normAutofit/>
-          </a:bodyPr>
-          <a:lstStyle/>
-          <a:p>
-            <a:pPr marL="0" indent="0">
-              <a:buNone/>
-            </a:pPr>
-            <a:endParaRPr lang="en-IN" sz="2400" dirty="0"/>
-          </a:p>
-        </p:txBody>
-      </p:sp>
-    </p:spTree>
-    <p:extLst>
-      <p:ext uri="{BB962C8B-B14F-4D97-AF65-F5344CB8AC3E}">
-        <p14:creationId xmlns:p14="http://schemas.microsoft.com/office/powerpoint/2010/main" val="3892924958"/>
-      </p:ext>
-    </p:extLst>
-  </p:cSld>
-  <p:clrMapOvr>
-    <a:masterClrMapping/>
-  </p:clrMapOvr>
-</p:sld>
-</file>
-
-<file path=ppt/slides/slide59.xml><?xml version="1.0" encoding="utf-8"?>
-<p:sld xmlns:a="http://schemas.openxmlformats.org/drawingml/2006/main" xmlns:r="http://schemas.openxmlformats.org/officeDocument/2006/relationships" xmlns:p="http://schemas.openxmlformats.org/presentationml/2006/main">
-  <p:cSld>
-    <p:spTree>
-      <p:nvGrpSpPr>
-        <p:cNvPr id="1" name="">
-          <a:extLst>
-            <a:ext uri="{FF2B5EF4-FFF2-40B4-BE49-F238E27FC236}">
-              <a16:creationId xmlns:a16="http://schemas.microsoft.com/office/drawing/2014/main" id="{28856BAB-6227-2C57-6074-2ED9DFBA68E8}"/>
-            </a:ext>
-          </a:extLst>
-        </p:cNvPr>
-        <p:cNvGrpSpPr/>
-        <p:nvPr/>
-      </p:nvGrpSpPr>
-      <p:grpSpPr>
-        <a:xfrm>
-          <a:off x="0" y="0"/>
-          <a:ext cx="0" cy="0"/>
-          <a:chOff x="0" y="0"/>
-          <a:chExt cx="0" cy="0"/>
-        </a:xfrm>
-      </p:grpSpPr>
-      <p:sp>
-        <p:nvSpPr>
-          <p:cNvPr id="3" name="Content Placeholder 2">
-            <a:extLst>
-              <a:ext uri="{FF2B5EF4-FFF2-40B4-BE49-F238E27FC236}">
-                <a16:creationId xmlns:a16="http://schemas.microsoft.com/office/drawing/2014/main" id="{7C09B089-0750-42AE-1630-8CA2F08705F8}"/>
-              </a:ext>
-            </a:extLst>
-          </p:cNvPr>
-          <p:cNvSpPr>
-            <a:spLocks noGrp="1"/>
-          </p:cNvSpPr>
-          <p:nvPr>
-            <p:ph idx="1"/>
-          </p:nvPr>
-        </p:nvSpPr>
-        <p:spPr>
-          <a:xfrm>
-            <a:off x="777240" y="696686"/>
-            <a:ext cx="10659110" cy="5480277"/>
-          </a:xfrm>
-        </p:spPr>
-        <p:txBody>
-          <a:bodyPr>
-            <a:normAutofit/>
-          </a:bodyPr>
-          <a:lstStyle/>
-          <a:p>
-            <a:pPr marL="0" indent="0">
-              <a:buNone/>
-            </a:pPr>
-            <a:endParaRPr lang="en-IN" sz="2400" dirty="0"/>
-          </a:p>
-        </p:txBody>
-      </p:sp>
-    </p:spTree>
-    <p:extLst>
-      <p:ext uri="{BB962C8B-B14F-4D97-AF65-F5344CB8AC3E}">
-        <p14:creationId xmlns:p14="http://schemas.microsoft.com/office/powerpoint/2010/main" val="208792046"/>
-      </p:ext>
-    </p:extLst>
-  </p:cSld>
-  <p:clrMapOvr>
-    <a:masterClrMapping/>
-  </p:clrMapOvr>
-</p:sld>
-</file>
-
 <file path=ppt/slides/slide6.xml><?xml version="1.0" encoding="utf-8"?>
 <p:sld xmlns:a="http://schemas.openxmlformats.org/drawingml/2006/main" xmlns:r="http://schemas.openxmlformats.org/officeDocument/2006/relationships" xmlns:p="http://schemas.openxmlformats.org/presentationml/2006/main">
   <p:cSld>
@@ -25249,148 +22814,6 @@
     <p:extLst>
       <p:ext uri="{BB962C8B-B14F-4D97-AF65-F5344CB8AC3E}">
         <p14:creationId xmlns:p14="http://schemas.microsoft.com/office/powerpoint/2010/main" val="3011003526"/>
-      </p:ext>
-    </p:extLst>
-  </p:cSld>
-  <p:clrMapOvr>
-    <a:masterClrMapping/>
-  </p:clrMapOvr>
-</p:sld>
-</file>
-
-<file path=ppt/slides/slide60.xml><?xml version="1.0" encoding="utf-8"?>
-<p:sld xmlns:a="http://schemas.openxmlformats.org/drawingml/2006/main" xmlns:r="http://schemas.openxmlformats.org/officeDocument/2006/relationships" xmlns:p="http://schemas.openxmlformats.org/presentationml/2006/main">
-  <p:cSld>
-    <p:spTree>
-      <p:nvGrpSpPr>
-        <p:cNvPr id="1" name="">
-          <a:extLst>
-            <a:ext uri="{FF2B5EF4-FFF2-40B4-BE49-F238E27FC236}">
-              <a16:creationId xmlns:a16="http://schemas.microsoft.com/office/drawing/2014/main" id="{5DCC3BE6-D9AC-6935-4C4D-909451659857}"/>
-            </a:ext>
-          </a:extLst>
-        </p:cNvPr>
-        <p:cNvGrpSpPr/>
-        <p:nvPr/>
-      </p:nvGrpSpPr>
-      <p:grpSpPr>
-        <a:xfrm>
-          <a:off x="0" y="0"/>
-          <a:ext cx="0" cy="0"/>
-          <a:chOff x="0" y="0"/>
-          <a:chExt cx="0" cy="0"/>
-        </a:xfrm>
-      </p:grpSpPr>
-      <p:sp>
-        <p:nvSpPr>
-          <p:cNvPr id="3" name="Content Placeholder 2">
-            <a:extLst>
-              <a:ext uri="{FF2B5EF4-FFF2-40B4-BE49-F238E27FC236}">
-                <a16:creationId xmlns:a16="http://schemas.microsoft.com/office/drawing/2014/main" id="{2891655D-C5EC-BCC8-E3FE-4CAFECDE8896}"/>
-              </a:ext>
-            </a:extLst>
-          </p:cNvPr>
-          <p:cNvSpPr>
-            <a:spLocks noGrp="1"/>
-          </p:cNvSpPr>
-          <p:nvPr>
-            <p:ph idx="1"/>
-          </p:nvPr>
-        </p:nvSpPr>
-        <p:spPr>
-          <a:xfrm>
-            <a:off x="777240" y="696686"/>
-            <a:ext cx="10659110" cy="5480277"/>
-          </a:xfrm>
-        </p:spPr>
-        <p:txBody>
-          <a:bodyPr>
-            <a:normAutofit/>
-          </a:bodyPr>
-          <a:lstStyle/>
-          <a:p>
-            <a:pPr marL="0" indent="0">
-              <a:buNone/>
-            </a:pPr>
-            <a:endParaRPr lang="en-IN" sz="2400" dirty="0"/>
-          </a:p>
-        </p:txBody>
-      </p:sp>
-    </p:spTree>
-    <p:extLst>
-      <p:ext uri="{BB962C8B-B14F-4D97-AF65-F5344CB8AC3E}">
-        <p14:creationId xmlns:p14="http://schemas.microsoft.com/office/powerpoint/2010/main" val="948425043"/>
-      </p:ext>
-    </p:extLst>
-  </p:cSld>
-  <p:clrMapOvr>
-    <a:masterClrMapping/>
-  </p:clrMapOvr>
-</p:sld>
-</file>
-
-<file path=ppt/slides/slide61.xml><?xml version="1.0" encoding="utf-8"?>
-<p:sld xmlns:a="http://schemas.openxmlformats.org/drawingml/2006/main" xmlns:r="http://schemas.openxmlformats.org/officeDocument/2006/relationships" xmlns:p="http://schemas.openxmlformats.org/presentationml/2006/main">
-  <p:cSld>
-    <p:spTree>
-      <p:nvGrpSpPr>
-        <p:cNvPr id="1" name="">
-          <a:extLst>
-            <a:ext uri="{FF2B5EF4-FFF2-40B4-BE49-F238E27FC236}">
-              <a16:creationId xmlns:a16="http://schemas.microsoft.com/office/drawing/2014/main" id="{08551D71-BFC4-3FFB-4968-8F9F4A0D842B}"/>
-            </a:ext>
-          </a:extLst>
-        </p:cNvPr>
-        <p:cNvGrpSpPr/>
-        <p:nvPr/>
-      </p:nvGrpSpPr>
-      <p:grpSpPr>
-        <a:xfrm>
-          <a:off x="0" y="0"/>
-          <a:ext cx="0" cy="0"/>
-          <a:chOff x="0" y="0"/>
-          <a:chExt cx="0" cy="0"/>
-        </a:xfrm>
-      </p:grpSpPr>
-      <p:sp>
-        <p:nvSpPr>
-          <p:cNvPr id="3" name="Content Placeholder 2">
-            <a:extLst>
-              <a:ext uri="{FF2B5EF4-FFF2-40B4-BE49-F238E27FC236}">
-                <a16:creationId xmlns:a16="http://schemas.microsoft.com/office/drawing/2014/main" id="{8837E388-CACE-4E4B-D235-FFF023260E69}"/>
-              </a:ext>
-            </a:extLst>
-          </p:cNvPr>
-          <p:cNvSpPr>
-            <a:spLocks noGrp="1"/>
-          </p:cNvSpPr>
-          <p:nvPr>
-            <p:ph idx="1"/>
-          </p:nvPr>
-        </p:nvSpPr>
-        <p:spPr>
-          <a:xfrm>
-            <a:off x="777240" y="696686"/>
-            <a:ext cx="10659110" cy="5480277"/>
-          </a:xfrm>
-        </p:spPr>
-        <p:txBody>
-          <a:bodyPr>
-            <a:normAutofit/>
-          </a:bodyPr>
-          <a:lstStyle/>
-          <a:p>
-            <a:pPr marL="0" indent="0">
-              <a:buNone/>
-            </a:pPr>
-            <a:endParaRPr lang="en-IN" sz="2400" dirty="0"/>
-          </a:p>
-        </p:txBody>
-      </p:sp>
-    </p:spTree>
-    <p:extLst>
-      <p:ext uri="{BB962C8B-B14F-4D97-AF65-F5344CB8AC3E}">
-        <p14:creationId xmlns:p14="http://schemas.microsoft.com/office/powerpoint/2010/main" val="2261098285"/>
       </p:ext>
     </p:extLst>
   </p:cSld>
@@ -26501,11 +23924,7 @@
           <a:p>
             <a:r>
               <a:rPr lang="en-US" sz="2400" dirty="0"/>
-              <a:t>You need </a:t>
-            </a:r>
-            <a:r>
-              <a:rPr lang="en-US" sz="2400"/>
-              <a:t>to pip install </a:t>
+              <a:t>You need to pip install </a:t>
             </a:r>
             <a:r>
               <a:rPr lang="en-US" dirty="0" err="1"/>

--- a/FastAPI/Introduction to FastAPI.pptx
+++ b/FastAPI/Introduction to FastAPI.pptx
@@ -162,7 +162,7 @@
 <file path=ppt/revisionInfo.xml><?xml version="1.0" encoding="utf-8"?>
 <p1510:revInfo xmlns:a="http://schemas.openxmlformats.org/drawingml/2006/main" xmlns:r="http://schemas.openxmlformats.org/officeDocument/2006/relationships" xmlns:p1510="http://schemas.microsoft.com/office/powerpoint/2015/10/main">
   <p1510:revLst>
-    <p1510:client id="{6146307C-A4FB-4FD5-8C0B-C077839C007C}" v="180" dt="2025-10-20T07:01:48.360"/>
+    <p1510:client id="{6146307C-A4FB-4FD5-8C0B-C077839C007C}" v="182" dt="2025-10-27T06:14:46.388"/>
   </p1510:revLst>
 </p1510:revInfo>
 </file>
@@ -172,7 +172,7 @@
   <pc:docChgLst>
     <pc:chgData name="Pramod Naik" userId="ceb6df04-ef15-4d9b-a141-998a03559d75" providerId="ADAL" clId="{62E9B5AE-779D-4001-92D3-8FF830A8A9C1}"/>
     <pc:docChg chg="undo custSel addSld delSld modSld">
-      <pc:chgData name="Pramod Naik" userId="ceb6df04-ef15-4d9b-a141-998a03559d75" providerId="ADAL" clId="{62E9B5AE-779D-4001-92D3-8FF830A8A9C1}" dt="2025-10-26T05:53:41.772" v="2460" actId="2696"/>
+      <pc:chgData name="Pramod Naik" userId="ceb6df04-ef15-4d9b-a141-998a03559d75" providerId="ADAL" clId="{62E9B5AE-779D-4001-92D3-8FF830A8A9C1}" dt="2025-10-27T06:29:12.801" v="2462" actId="207"/>
       <pc:docMkLst>
         <pc:docMk/>
       </pc:docMkLst>
@@ -764,13 +764,13 @@
         </pc:spChg>
       </pc:sldChg>
       <pc:sldChg chg="addSp modSp add mod">
-        <pc:chgData name="Pramod Naik" userId="ceb6df04-ef15-4d9b-a141-998a03559d75" providerId="ADAL" clId="{62E9B5AE-779D-4001-92D3-8FF830A8A9C1}" dt="2025-10-11T10:59:19.965" v="1148" actId="207"/>
+        <pc:chgData name="Pramod Naik" userId="ceb6df04-ef15-4d9b-a141-998a03559d75" providerId="ADAL" clId="{62E9B5AE-779D-4001-92D3-8FF830A8A9C1}" dt="2025-10-27T06:14:45.105" v="2461" actId="20578"/>
         <pc:sldMkLst>
           <pc:docMk/>
           <pc:sldMk cId="1663416122" sldId="538"/>
         </pc:sldMkLst>
         <pc:spChg chg="mod">
-          <ac:chgData name="Pramod Naik" userId="ceb6df04-ef15-4d9b-a141-998a03559d75" providerId="ADAL" clId="{62E9B5AE-779D-4001-92D3-8FF830A8A9C1}" dt="2025-10-11T10:59:19.965" v="1148" actId="207"/>
+          <ac:chgData name="Pramod Naik" userId="ceb6df04-ef15-4d9b-a141-998a03559d75" providerId="ADAL" clId="{62E9B5AE-779D-4001-92D3-8FF830A8A9C1}" dt="2025-10-27T06:14:45.105" v="2461" actId="20578"/>
           <ac:spMkLst>
             <pc:docMk/>
             <pc:sldMk cId="1663416122" sldId="538"/>
@@ -1506,13 +1506,13 @@
         </pc:picChg>
       </pc:sldChg>
       <pc:sldChg chg="modSp add mod">
-        <pc:chgData name="Pramod Naik" userId="ceb6df04-ef15-4d9b-a141-998a03559d75" providerId="ADAL" clId="{62E9B5AE-779D-4001-92D3-8FF830A8A9C1}" dt="2025-10-24T07:03:22.004" v="2411" actId="404"/>
+        <pc:chgData name="Pramod Naik" userId="ceb6df04-ef15-4d9b-a141-998a03559d75" providerId="ADAL" clId="{62E9B5AE-779D-4001-92D3-8FF830A8A9C1}" dt="2025-10-27T06:29:12.801" v="2462" actId="207"/>
         <pc:sldMkLst>
           <pc:docMk/>
           <pc:sldMk cId="1668062704" sldId="568"/>
         </pc:sldMkLst>
         <pc:spChg chg="mod">
-          <ac:chgData name="Pramod Naik" userId="ceb6df04-ef15-4d9b-a141-998a03559d75" providerId="ADAL" clId="{62E9B5AE-779D-4001-92D3-8FF830A8A9C1}" dt="2025-10-24T07:03:22.004" v="2411" actId="404"/>
+          <ac:chgData name="Pramod Naik" userId="ceb6df04-ef15-4d9b-a141-998a03559d75" providerId="ADAL" clId="{62E9B5AE-779D-4001-92D3-8FF830A8A9C1}" dt="2025-10-27T06:29:12.801" v="2462" actId="207"/>
           <ac:spMkLst>
             <pc:docMk/>
             <pc:sldMk cId="1668062704" sldId="568"/>
@@ -1885,7 +1885,7 @@
           <a:p>
             <a:fld id="{61532AF1-4615-4667-912A-829B12F8C4D2}" type="datetimeFigureOut">
               <a:rPr lang="en-IN" smtClean="0"/>
-              <a:t>26-10-2025</a:t>
+              <a:t>27-10-2025</a:t>
             </a:fld>
             <a:endParaRPr lang="en-IN"/>
           </a:p>
@@ -2302,7 +2302,7 @@
           <a:p>
             <a:fld id="{C43A76A3-ADC8-4477-8FC1-B9DD55D84908}" type="datetime1">
               <a:rPr lang="en-US" smtClean="0"/>
-              <a:t>10/26/2025</a:t>
+              <a:t>10/27/2025</a:t>
             </a:fld>
             <a:endParaRPr lang="en-US" dirty="0"/>
           </a:p>
@@ -2500,7 +2500,7 @@
           <a:p>
             <a:fld id="{D6762538-DC4D-4667-96E5-B3278DDF8B12}" type="datetime1">
               <a:rPr lang="en-US" smtClean="0"/>
-              <a:t>10/26/2025</a:t>
+              <a:t>10/27/2025</a:t>
             </a:fld>
             <a:endParaRPr lang="en-US"/>
           </a:p>
@@ -2708,7 +2708,7 @@
           <a:p>
             <a:fld id="{05880548-5C08-4BE3-B63E-F2BB63B0B00C}" type="datetime1">
               <a:rPr lang="en-US" smtClean="0"/>
-              <a:t>10/26/2025</a:t>
+              <a:t>10/27/2025</a:t>
             </a:fld>
             <a:endParaRPr lang="en-US"/>
           </a:p>
@@ -2906,7 +2906,7 @@
           <a:p>
             <a:fld id="{DE7F49BE-398D-479A-8A7E-5DDBCA61EDCB}" type="datetime1">
               <a:rPr lang="en-US" smtClean="0"/>
-              <a:t>10/26/2025</a:t>
+              <a:t>10/27/2025</a:t>
             </a:fld>
             <a:endParaRPr lang="en-US" dirty="0"/>
           </a:p>
@@ -3182,7 +3182,7 @@
           <a:p>
             <a:fld id="{CCD0C193-4974-4A1F-9C63-07D595E30D66}" type="datetime1">
               <a:rPr lang="en-US" smtClean="0"/>
-              <a:t>10/26/2025</a:t>
+              <a:t>10/27/2025</a:t>
             </a:fld>
             <a:endParaRPr lang="en-US"/>
           </a:p>
@@ -3449,7 +3449,7 @@
           <a:p>
             <a:fld id="{701AA87F-28D4-4BF0-B81F-877A89DFD5AC}" type="datetime1">
               <a:rPr lang="en-US" smtClean="0"/>
-              <a:t>10/26/2025</a:t>
+              <a:t>10/27/2025</a:t>
             </a:fld>
             <a:endParaRPr lang="en-US"/>
           </a:p>
@@ -3863,7 +3863,7 @@
           <a:p>
             <a:fld id="{A8A9F1F3-208B-49A3-B337-9C8ACEB3E0E1}" type="datetime1">
               <a:rPr lang="en-US" smtClean="0"/>
-              <a:t>10/26/2025</a:t>
+              <a:t>10/27/2025</a:t>
             </a:fld>
             <a:endParaRPr lang="en-US"/>
           </a:p>
@@ -4010,7 +4010,7 @@
           <a:p>
             <a:fld id="{27AF6CA6-7293-4AA2-A0E0-A3BF4416E786}" type="datetime1">
               <a:rPr lang="en-US" smtClean="0"/>
-              <a:t>10/26/2025</a:t>
+              <a:t>10/27/2025</a:t>
             </a:fld>
             <a:endParaRPr lang="en-US"/>
           </a:p>
@@ -4123,7 +4123,7 @@
           <a:p>
             <a:fld id="{98D87016-7BCD-46FB-8EE3-AB6C369108B4}" type="datetime1">
               <a:rPr lang="en-US" smtClean="0"/>
-              <a:t>10/26/2025</a:t>
+              <a:t>10/27/2025</a:t>
             </a:fld>
             <a:endParaRPr lang="en-US"/>
           </a:p>
@@ -4442,7 +4442,7 @@
           <a:p>
             <a:fld id="{A1547011-1FFC-4EF8-9A2E-53B4AD2ADBD4}" type="datetime1">
               <a:rPr lang="en-US" smtClean="0"/>
-              <a:t>10/26/2025</a:t>
+              <a:t>10/27/2025</a:t>
             </a:fld>
             <a:endParaRPr lang="en-US"/>
           </a:p>
@@ -4737,7 +4737,7 @@
           <a:p>
             <a:fld id="{9562EB47-45B4-4EF5-A743-B4885DD2F060}" type="datetime1">
               <a:rPr lang="en-US" smtClean="0"/>
-              <a:t>10/26/2025</a:t>
+              <a:t>10/27/2025</a:t>
             </a:fld>
             <a:endParaRPr lang="en-US"/>
           </a:p>
@@ -6122,7 +6122,7 @@
           <a:p>
             <a:fld id="{4A8D24A4-5FEC-4062-8995-EB21925B3B40}" type="datetime1">
               <a:rPr lang="en-US" smtClean="0"/>
-              <a:t>10/26/2025</a:t>
+              <a:t>10/27/2025</a:t>
             </a:fld>
             <a:endParaRPr lang="en-US" sz="1000" dirty="0"/>
           </a:p>
@@ -20645,7 +20645,11 @@
               <a:t>class provided by </a:t>
             </a:r>
             <a:r>
-              <a:rPr lang="en-US" sz="2800" b="1" dirty="0" err="1"/>
+              <a:rPr lang="en-US" sz="2800" b="1" dirty="0" err="1">
+                <a:solidFill>
+                  <a:srgbClr val="002060"/>
+                </a:solidFill>
+              </a:rPr>
               <a:t>Pydantic</a:t>
             </a:r>
             <a:r>
